--- a/OpenShift DO280 – Day 2.pptx
+++ b/OpenShift DO280 – Day 2.pptx
@@ -4,6 +4,9 @@
   <p:sldMasterIdLst>
     <p:sldMasterId id="2147483660" r:id="rId1"/>
   </p:sldMasterIdLst>
+  <p:notesMasterIdLst>
+    <p:notesMasterId r:id="rId20"/>
+  </p:notesMasterIdLst>
   <p:sldIdLst>
     <p:sldId id="256" r:id="rId2"/>
     <p:sldId id="272" r:id="rId3"/>
@@ -15,13 +18,14 @@
     <p:sldId id="276" r:id="rId9"/>
     <p:sldId id="277" r:id="rId10"/>
     <p:sldId id="289" r:id="rId11"/>
-    <p:sldId id="278" r:id="rId12"/>
-    <p:sldId id="279" r:id="rId13"/>
-    <p:sldId id="280" r:id="rId14"/>
-    <p:sldId id="290" r:id="rId15"/>
-    <p:sldId id="281" r:id="rId16"/>
-    <p:sldId id="282" r:id="rId17"/>
-    <p:sldId id="283" r:id="rId18"/>
+    <p:sldId id="291" r:id="rId12"/>
+    <p:sldId id="278" r:id="rId13"/>
+    <p:sldId id="279" r:id="rId14"/>
+    <p:sldId id="280" r:id="rId15"/>
+    <p:sldId id="290" r:id="rId16"/>
+    <p:sldId id="281" r:id="rId17"/>
+    <p:sldId id="282" r:id="rId18"/>
+    <p:sldId id="283" r:id="rId19"/>
   </p:sldIdLst>
   <p:sldSz cx="12192000" cy="6858000"/>
   <p:notesSz cx="6858000" cy="9144000"/>
@@ -25311,6 +25315,780 @@
 </dgm:styleDef>
 </file>
 
+<file path=ppt/notesMasters/notesMaster1.xml><?xml version="1.0" encoding="utf-8"?>
+<p:notesMaster xmlns:a="http://schemas.openxmlformats.org/drawingml/2006/main" xmlns:r="http://schemas.openxmlformats.org/officeDocument/2006/relationships" xmlns:p="http://schemas.openxmlformats.org/presentationml/2006/main">
+  <p:cSld>
+    <p:bg>
+      <p:bgRef idx="1001">
+        <a:schemeClr val="bg1"/>
+      </p:bgRef>
+    </p:bg>
+    <p:spTree>
+      <p:nvGrpSpPr>
+        <p:cNvPr id="1" name=""/>
+        <p:cNvGrpSpPr/>
+        <p:nvPr/>
+      </p:nvGrpSpPr>
+      <p:grpSpPr>
+        <a:xfrm>
+          <a:off x="0" y="0"/>
+          <a:ext cx="0" cy="0"/>
+          <a:chOff x="0" y="0"/>
+          <a:chExt cx="0" cy="0"/>
+        </a:xfrm>
+      </p:grpSpPr>
+      <p:sp>
+        <p:nvSpPr>
+          <p:cNvPr id="2" name="Header Placeholder 1"/>
+          <p:cNvSpPr>
+            <a:spLocks noGrp="1"/>
+          </p:cNvSpPr>
+          <p:nvPr>
+            <p:ph type="hdr" sz="quarter"/>
+          </p:nvPr>
+        </p:nvSpPr>
+        <p:spPr>
+          <a:xfrm>
+            <a:off x="0" y="0"/>
+            <a:ext cx="2971800" cy="458788"/>
+          </a:xfrm>
+          <a:prstGeom prst="rect">
+            <a:avLst/>
+          </a:prstGeom>
+        </p:spPr>
+        <p:txBody>
+          <a:bodyPr vert="horz" lIns="91440" tIns="45720" rIns="91440" bIns="45720" rtlCol="0"/>
+          <a:lstStyle>
+            <a:lvl1pPr algn="l">
+              <a:defRPr sz="1200"/>
+            </a:lvl1pPr>
+          </a:lstStyle>
+          <a:p>
+            <a:endParaRPr lang="en-US"/>
+          </a:p>
+        </p:txBody>
+      </p:sp>
+      <p:sp>
+        <p:nvSpPr>
+          <p:cNvPr id="3" name="Date Placeholder 2"/>
+          <p:cNvSpPr>
+            <a:spLocks noGrp="1"/>
+          </p:cNvSpPr>
+          <p:nvPr>
+            <p:ph type="dt" idx="1"/>
+          </p:nvPr>
+        </p:nvSpPr>
+        <p:spPr>
+          <a:xfrm>
+            <a:off x="3884613" y="0"/>
+            <a:ext cx="2971800" cy="458788"/>
+          </a:xfrm>
+          <a:prstGeom prst="rect">
+            <a:avLst/>
+          </a:prstGeom>
+        </p:spPr>
+        <p:txBody>
+          <a:bodyPr vert="horz" lIns="91440" tIns="45720" rIns="91440" bIns="45720" rtlCol="0"/>
+          <a:lstStyle>
+            <a:lvl1pPr algn="r">
+              <a:defRPr sz="1200"/>
+            </a:lvl1pPr>
+          </a:lstStyle>
+          <a:p>
+            <a:fld id="{BF176767-5C91-45B9-A7EE-5AE976506D9D}" type="datetimeFigureOut">
+              <a:rPr lang="en-US" smtClean="0"/>
+              <a:t>3/30/2026</a:t>
+            </a:fld>
+            <a:endParaRPr lang="en-US"/>
+          </a:p>
+        </p:txBody>
+      </p:sp>
+      <p:sp>
+        <p:nvSpPr>
+          <p:cNvPr id="4" name="Slide Image Placeholder 3"/>
+          <p:cNvSpPr>
+            <a:spLocks noGrp="1" noRot="1" noChangeAspect="1"/>
+          </p:cNvSpPr>
+          <p:nvPr>
+            <p:ph type="sldImg" idx="2"/>
+          </p:nvPr>
+        </p:nvSpPr>
+        <p:spPr>
+          <a:xfrm>
+            <a:off x="685800" y="1143000"/>
+            <a:ext cx="5486400" cy="3086100"/>
+          </a:xfrm>
+          <a:prstGeom prst="rect">
+            <a:avLst/>
+          </a:prstGeom>
+          <a:noFill/>
+          <a:ln w="12700">
+            <a:solidFill>
+              <a:prstClr val="black"/>
+            </a:solidFill>
+          </a:ln>
+        </p:spPr>
+        <p:txBody>
+          <a:bodyPr vert="horz" lIns="91440" tIns="45720" rIns="91440" bIns="45720" rtlCol="0" anchor="ctr"/>
+          <a:lstStyle/>
+          <a:p>
+            <a:endParaRPr lang="en-US"/>
+          </a:p>
+        </p:txBody>
+      </p:sp>
+      <p:sp>
+        <p:nvSpPr>
+          <p:cNvPr id="5" name="Notes Placeholder 4"/>
+          <p:cNvSpPr>
+            <a:spLocks noGrp="1"/>
+          </p:cNvSpPr>
+          <p:nvPr>
+            <p:ph type="body" sz="quarter" idx="3"/>
+          </p:nvPr>
+        </p:nvSpPr>
+        <p:spPr>
+          <a:xfrm>
+            <a:off x="685800" y="4400550"/>
+            <a:ext cx="5486400" cy="3600450"/>
+          </a:xfrm>
+          <a:prstGeom prst="rect">
+            <a:avLst/>
+          </a:prstGeom>
+        </p:spPr>
+        <p:txBody>
+          <a:bodyPr vert="horz" lIns="91440" tIns="45720" rIns="91440" bIns="45720" rtlCol="0"/>
+          <a:lstStyle/>
+          <a:p>
+            <a:pPr lvl="0"/>
+            <a:r>
+              <a:rPr lang="en-US"/>
+              <a:t>Click to edit Master text styles</a:t>
+            </a:r>
+          </a:p>
+          <a:p>
+            <a:pPr lvl="1"/>
+            <a:r>
+              <a:rPr lang="en-US"/>
+              <a:t>Second level</a:t>
+            </a:r>
+          </a:p>
+          <a:p>
+            <a:pPr lvl="2"/>
+            <a:r>
+              <a:rPr lang="en-US"/>
+              <a:t>Third level</a:t>
+            </a:r>
+          </a:p>
+          <a:p>
+            <a:pPr lvl="3"/>
+            <a:r>
+              <a:rPr lang="en-US"/>
+              <a:t>Fourth level</a:t>
+            </a:r>
+          </a:p>
+          <a:p>
+            <a:pPr lvl="4"/>
+            <a:r>
+              <a:rPr lang="en-US"/>
+              <a:t>Fifth level</a:t>
+            </a:r>
+          </a:p>
+        </p:txBody>
+      </p:sp>
+      <p:sp>
+        <p:nvSpPr>
+          <p:cNvPr id="6" name="Footer Placeholder 5"/>
+          <p:cNvSpPr>
+            <a:spLocks noGrp="1"/>
+          </p:cNvSpPr>
+          <p:nvPr>
+            <p:ph type="ftr" sz="quarter" idx="4"/>
+          </p:nvPr>
+        </p:nvSpPr>
+        <p:spPr>
+          <a:xfrm>
+            <a:off x="0" y="8685213"/>
+            <a:ext cx="2971800" cy="458787"/>
+          </a:xfrm>
+          <a:prstGeom prst="rect">
+            <a:avLst/>
+          </a:prstGeom>
+        </p:spPr>
+        <p:txBody>
+          <a:bodyPr vert="horz" lIns="91440" tIns="45720" rIns="91440" bIns="45720" rtlCol="0" anchor="b"/>
+          <a:lstStyle>
+            <a:lvl1pPr algn="l">
+              <a:defRPr sz="1200"/>
+            </a:lvl1pPr>
+          </a:lstStyle>
+          <a:p>
+            <a:endParaRPr lang="en-US"/>
+          </a:p>
+        </p:txBody>
+      </p:sp>
+      <p:sp>
+        <p:nvSpPr>
+          <p:cNvPr id="7" name="Slide Number Placeholder 6"/>
+          <p:cNvSpPr>
+            <a:spLocks noGrp="1"/>
+          </p:cNvSpPr>
+          <p:nvPr>
+            <p:ph type="sldNum" sz="quarter" idx="5"/>
+          </p:nvPr>
+        </p:nvSpPr>
+        <p:spPr>
+          <a:xfrm>
+            <a:off x="3884613" y="8685213"/>
+            <a:ext cx="2971800" cy="458787"/>
+          </a:xfrm>
+          <a:prstGeom prst="rect">
+            <a:avLst/>
+          </a:prstGeom>
+        </p:spPr>
+        <p:txBody>
+          <a:bodyPr vert="horz" lIns="91440" tIns="45720" rIns="91440" bIns="45720" rtlCol="0" anchor="b"/>
+          <a:lstStyle>
+            <a:lvl1pPr algn="r">
+              <a:defRPr sz="1200"/>
+            </a:lvl1pPr>
+          </a:lstStyle>
+          <a:p>
+            <a:fld id="{E5F433E1-6874-4E0D-9A73-25A2B6DE9913}" type="slidenum">
+              <a:rPr lang="en-US" smtClean="0"/>
+              <a:t>‹#›</a:t>
+            </a:fld>
+            <a:endParaRPr lang="en-US"/>
+          </a:p>
+        </p:txBody>
+      </p:sp>
+    </p:spTree>
+    <p:extLst>
+      <p:ext uri="{BB962C8B-B14F-4D97-AF65-F5344CB8AC3E}">
+        <p14:creationId xmlns:p14="http://schemas.microsoft.com/office/powerpoint/2010/main" val="1840455350"/>
+      </p:ext>
+    </p:extLst>
+  </p:cSld>
+  <p:clrMap bg1="lt1" tx1="dk1" bg2="lt2" tx2="dk2" accent1="accent1" accent2="accent2" accent3="accent3" accent4="accent4" accent5="accent5" accent6="accent6" hlink="hlink" folHlink="folHlink"/>
+  <p:notesStyle>
+    <a:lvl1pPr marL="0" algn="l" defTabSz="914400" rtl="0" eaLnBrk="1" latinLnBrk="0" hangingPunct="1">
+      <a:defRPr sz="1200" kern="1200">
+        <a:solidFill>
+          <a:schemeClr val="tx1"/>
+        </a:solidFill>
+        <a:latin typeface="+mn-lt"/>
+        <a:ea typeface="+mn-ea"/>
+        <a:cs typeface="+mn-cs"/>
+      </a:defRPr>
+    </a:lvl1pPr>
+    <a:lvl2pPr marL="457200" algn="l" defTabSz="914400" rtl="0" eaLnBrk="1" latinLnBrk="0" hangingPunct="1">
+      <a:defRPr sz="1200" kern="1200">
+        <a:solidFill>
+          <a:schemeClr val="tx1"/>
+        </a:solidFill>
+        <a:latin typeface="+mn-lt"/>
+        <a:ea typeface="+mn-ea"/>
+        <a:cs typeface="+mn-cs"/>
+      </a:defRPr>
+    </a:lvl2pPr>
+    <a:lvl3pPr marL="914400" algn="l" defTabSz="914400" rtl="0" eaLnBrk="1" latinLnBrk="0" hangingPunct="1">
+      <a:defRPr sz="1200" kern="1200">
+        <a:solidFill>
+          <a:schemeClr val="tx1"/>
+        </a:solidFill>
+        <a:latin typeface="+mn-lt"/>
+        <a:ea typeface="+mn-ea"/>
+        <a:cs typeface="+mn-cs"/>
+      </a:defRPr>
+    </a:lvl3pPr>
+    <a:lvl4pPr marL="1371600" algn="l" defTabSz="914400" rtl="0" eaLnBrk="1" latinLnBrk="0" hangingPunct="1">
+      <a:defRPr sz="1200" kern="1200">
+        <a:solidFill>
+          <a:schemeClr val="tx1"/>
+        </a:solidFill>
+        <a:latin typeface="+mn-lt"/>
+        <a:ea typeface="+mn-ea"/>
+        <a:cs typeface="+mn-cs"/>
+      </a:defRPr>
+    </a:lvl4pPr>
+    <a:lvl5pPr marL="1828800" algn="l" defTabSz="914400" rtl="0" eaLnBrk="1" latinLnBrk="0" hangingPunct="1">
+      <a:defRPr sz="1200" kern="1200">
+        <a:solidFill>
+          <a:schemeClr val="tx1"/>
+        </a:solidFill>
+        <a:latin typeface="+mn-lt"/>
+        <a:ea typeface="+mn-ea"/>
+        <a:cs typeface="+mn-cs"/>
+      </a:defRPr>
+    </a:lvl5pPr>
+    <a:lvl6pPr marL="2286000" algn="l" defTabSz="914400" rtl="0" eaLnBrk="1" latinLnBrk="0" hangingPunct="1">
+      <a:defRPr sz="1200" kern="1200">
+        <a:solidFill>
+          <a:schemeClr val="tx1"/>
+        </a:solidFill>
+        <a:latin typeface="+mn-lt"/>
+        <a:ea typeface="+mn-ea"/>
+        <a:cs typeface="+mn-cs"/>
+      </a:defRPr>
+    </a:lvl6pPr>
+    <a:lvl7pPr marL="2743200" algn="l" defTabSz="914400" rtl="0" eaLnBrk="1" latinLnBrk="0" hangingPunct="1">
+      <a:defRPr sz="1200" kern="1200">
+        <a:solidFill>
+          <a:schemeClr val="tx1"/>
+        </a:solidFill>
+        <a:latin typeface="+mn-lt"/>
+        <a:ea typeface="+mn-ea"/>
+        <a:cs typeface="+mn-cs"/>
+      </a:defRPr>
+    </a:lvl7pPr>
+    <a:lvl8pPr marL="3200400" algn="l" defTabSz="914400" rtl="0" eaLnBrk="1" latinLnBrk="0" hangingPunct="1">
+      <a:defRPr sz="1200" kern="1200">
+        <a:solidFill>
+          <a:schemeClr val="tx1"/>
+        </a:solidFill>
+        <a:latin typeface="+mn-lt"/>
+        <a:ea typeface="+mn-ea"/>
+        <a:cs typeface="+mn-cs"/>
+      </a:defRPr>
+    </a:lvl8pPr>
+    <a:lvl9pPr marL="3657600" algn="l" defTabSz="914400" rtl="0" eaLnBrk="1" latinLnBrk="0" hangingPunct="1">
+      <a:defRPr sz="1200" kern="1200">
+        <a:solidFill>
+          <a:schemeClr val="tx1"/>
+        </a:solidFill>
+        <a:latin typeface="+mn-lt"/>
+        <a:ea typeface="+mn-ea"/>
+        <a:cs typeface="+mn-cs"/>
+      </a:defRPr>
+    </a:lvl9pPr>
+  </p:notesStyle>
+</p:notesMaster>
+</file>
+
+<file path=ppt/notesSlides/notesSlide1.xml><?xml version="1.0" encoding="utf-8"?>
+<p:notes xmlns:a="http://schemas.openxmlformats.org/drawingml/2006/main" xmlns:r="http://schemas.openxmlformats.org/officeDocument/2006/relationships" xmlns:p="http://schemas.openxmlformats.org/presentationml/2006/main">
+  <p:cSld>
+    <p:spTree>
+      <p:nvGrpSpPr>
+        <p:cNvPr id="1" name=""/>
+        <p:cNvGrpSpPr/>
+        <p:nvPr/>
+      </p:nvGrpSpPr>
+      <p:grpSpPr>
+        <a:xfrm>
+          <a:off x="0" y="0"/>
+          <a:ext cx="0" cy="0"/>
+          <a:chOff x="0" y="0"/>
+          <a:chExt cx="0" cy="0"/>
+        </a:xfrm>
+      </p:grpSpPr>
+      <p:sp>
+        <p:nvSpPr>
+          <p:cNvPr id="2" name="Slide Image Placeholder 1"/>
+          <p:cNvSpPr>
+            <a:spLocks noGrp="1" noRot="1" noChangeAspect="1"/>
+          </p:cNvSpPr>
+          <p:nvPr>
+            <p:ph type="sldImg"/>
+          </p:nvPr>
+        </p:nvSpPr>
+        <p:spPr/>
+      </p:sp>
+      <p:sp>
+        <p:nvSpPr>
+          <p:cNvPr id="3" name="Notes Placeholder 2"/>
+          <p:cNvSpPr>
+            <a:spLocks noGrp="1"/>
+          </p:cNvSpPr>
+          <p:nvPr>
+            <p:ph type="body" idx="1"/>
+          </p:nvPr>
+        </p:nvSpPr>
+        <p:spPr/>
+        <p:txBody>
+          <a:bodyPr/>
+          <a:lstStyle/>
+          <a:p>
+            <a:r>
+              <a:rPr lang="en-US" b="1" dirty="0"/>
+              <a:t>🛠️ 4. Role</a:t>
+            </a:r>
+          </a:p>
+          <a:p>
+            <a:r>
+              <a:rPr lang="en-US" dirty="0"/>
+              <a:t>Example:</a:t>
+            </a:r>
+          </a:p>
+          <a:p>
+            <a:r>
+              <a:rPr lang="en-US" dirty="0"/>
+              <a:t>Allow pod creation only </a:t>
+            </a:r>
+          </a:p>
+          <a:p>
+            <a:r>
+              <a:rPr lang="en-US" dirty="0"/>
+              <a:t>Use when:</a:t>
+            </a:r>
+            <a:br>
+              <a:rPr lang="en-US" dirty="0"/>
+            </a:br>
+            <a:r>
+              <a:rPr lang="en-US" dirty="0"/>
+              <a:t>✔ Access limited to one project</a:t>
+            </a:r>
+            <a:br>
+              <a:rPr lang="en-US" dirty="0"/>
+            </a:br>
+            <a:r>
+              <a:rPr lang="en-US" dirty="0"/>
+              <a:t>✔ Fine-grained permissions</a:t>
+            </a:r>
+          </a:p>
+          <a:p>
+            <a:br>
+              <a:rPr lang="en-US" dirty="0"/>
+            </a:br>
+            <a:endParaRPr lang="en-US" dirty="0"/>
+          </a:p>
+          <a:p>
+            <a:r>
+              <a:rPr lang="en-US" b="1" dirty="0"/>
+              <a:t>🌍 5. </a:t>
+            </a:r>
+            <a:r>
+              <a:rPr lang="en-US" b="1" dirty="0" err="1"/>
+              <a:t>ClusterRole</a:t>
+            </a:r>
+            <a:endParaRPr lang="en-US" b="1" dirty="0"/>
+          </a:p>
+          <a:p>
+            <a:r>
+              <a:rPr lang="en-US" dirty="0"/>
+              <a:t>👉 Example:</a:t>
+            </a:r>
+          </a:p>
+          <a:p>
+            <a:r>
+              <a:rPr lang="en-US" dirty="0"/>
+              <a:t>Read nodes </a:t>
+            </a:r>
+          </a:p>
+          <a:p>
+            <a:r>
+              <a:rPr lang="en-US" dirty="0"/>
+              <a:t>Admin entire cluster </a:t>
+            </a:r>
+          </a:p>
+          <a:p>
+            <a:r>
+              <a:rPr lang="en-US" dirty="0"/>
+              <a:t>Use when:</a:t>
+            </a:r>
+            <a:br>
+              <a:rPr lang="en-US" dirty="0"/>
+            </a:br>
+            <a:r>
+              <a:rPr lang="en-US" dirty="0"/>
+              <a:t>✔ Access across namespaces</a:t>
+            </a:r>
+            <a:br>
+              <a:rPr lang="en-US" dirty="0"/>
+            </a:br>
+            <a:r>
+              <a:rPr lang="en-US" dirty="0"/>
+              <a:t>✔ Infra-level operations</a:t>
+            </a:r>
+          </a:p>
+          <a:p>
+            <a:br>
+              <a:rPr lang="en-US" dirty="0"/>
+            </a:br>
+            <a:endParaRPr lang="en-US" dirty="0"/>
+          </a:p>
+          <a:p>
+            <a:r>
+              <a:rPr lang="en-US" b="1" dirty="0"/>
+              <a:t>🔗 6. </a:t>
+            </a:r>
+            <a:r>
+              <a:rPr lang="en-US" b="1" dirty="0" err="1"/>
+              <a:t>RoleBinding</a:t>
+            </a:r>
+            <a:endParaRPr lang="en-US" b="1" dirty="0"/>
+          </a:p>
+          <a:p>
+            <a:r>
+              <a:rPr lang="en-US" dirty="0"/>
+              <a:t>👉 Example:</a:t>
+            </a:r>
+          </a:p>
+          <a:p>
+            <a:pPr rtl="0"/>
+            <a:r>
+              <a:rPr lang="en-US" sz="1200" kern="1200" dirty="0" err="1">
+                <a:solidFill>
+                  <a:schemeClr val="tx1"/>
+                </a:solidFill>
+                <a:latin typeface="+mn-lt"/>
+                <a:ea typeface="+mn-ea"/>
+                <a:cs typeface="+mn-cs"/>
+              </a:rPr>
+              <a:t>oc</a:t>
+            </a:r>
+            <a:r>
+              <a:rPr lang="en-US" sz="1200" kern="1200" dirty="0">
+                <a:solidFill>
+                  <a:schemeClr val="tx1"/>
+                </a:solidFill>
+                <a:latin typeface="+mn-lt"/>
+                <a:ea typeface="+mn-ea"/>
+                <a:cs typeface="+mn-cs"/>
+              </a:rPr>
+              <a:t> create </a:t>
+            </a:r>
+            <a:r>
+              <a:rPr lang="en-US" sz="1200" kern="1200" dirty="0" err="1">
+                <a:solidFill>
+                  <a:schemeClr val="tx1"/>
+                </a:solidFill>
+                <a:latin typeface="+mn-lt"/>
+                <a:ea typeface="+mn-ea"/>
+                <a:cs typeface="+mn-cs"/>
+              </a:rPr>
+              <a:t>rolebinding</a:t>
+            </a:r>
+            <a:r>
+              <a:rPr lang="en-US" sz="1200" kern="1200" dirty="0">
+                <a:solidFill>
+                  <a:schemeClr val="tx1"/>
+                </a:solidFill>
+                <a:latin typeface="+mn-lt"/>
+                <a:ea typeface="+mn-ea"/>
+                <a:cs typeface="+mn-cs"/>
+              </a:rPr>
+              <a:t> dev-binding \</a:t>
+            </a:r>
+            <a:br>
+              <a:rPr lang="en-US" sz="1200" kern="1200" dirty="0">
+                <a:solidFill>
+                  <a:schemeClr val="tx1"/>
+                </a:solidFill>
+                <a:latin typeface="+mn-lt"/>
+                <a:ea typeface="+mn-ea"/>
+                <a:cs typeface="+mn-cs"/>
+              </a:rPr>
+            </a:br>
+            <a:r>
+              <a:rPr lang="en-US" sz="1200" kern="1200" dirty="0">
+                <a:solidFill>
+                  <a:schemeClr val="tx1"/>
+                </a:solidFill>
+                <a:latin typeface="+mn-lt"/>
+                <a:ea typeface="+mn-ea"/>
+                <a:cs typeface="+mn-cs"/>
+              </a:rPr>
+              <a:t>  --role=edit \</a:t>
+            </a:r>
+            <a:br>
+              <a:rPr lang="en-US" sz="1200" kern="1200" dirty="0">
+                <a:solidFill>
+                  <a:schemeClr val="tx1"/>
+                </a:solidFill>
+                <a:latin typeface="+mn-lt"/>
+                <a:ea typeface="+mn-ea"/>
+                <a:cs typeface="+mn-cs"/>
+              </a:rPr>
+            </a:br>
+            <a:r>
+              <a:rPr lang="en-US" sz="1200" kern="1200" dirty="0">
+                <a:solidFill>
+                  <a:schemeClr val="tx1"/>
+                </a:solidFill>
+                <a:latin typeface="+mn-lt"/>
+                <a:ea typeface="+mn-ea"/>
+                <a:cs typeface="+mn-cs"/>
+              </a:rPr>
+              <a:t>  --user=student1 \</a:t>
+            </a:r>
+            <a:br>
+              <a:rPr lang="en-US" sz="1200" kern="1200" dirty="0">
+                <a:solidFill>
+                  <a:schemeClr val="tx1"/>
+                </a:solidFill>
+                <a:latin typeface="+mn-lt"/>
+                <a:ea typeface="+mn-ea"/>
+                <a:cs typeface="+mn-cs"/>
+              </a:rPr>
+            </a:br>
+            <a:r>
+              <a:rPr lang="en-US" sz="1200" kern="1200" dirty="0">
+                <a:solidFill>
+                  <a:schemeClr val="tx1"/>
+                </a:solidFill>
+                <a:latin typeface="+mn-lt"/>
+                <a:ea typeface="+mn-ea"/>
+                <a:cs typeface="+mn-cs"/>
+              </a:rPr>
+              <a:t>  -n project1</a:t>
+            </a:r>
+          </a:p>
+          <a:p>
+            <a:r>
+              <a:rPr lang="en-US" dirty="0"/>
+              <a:t>Use when:</a:t>
+            </a:r>
+            <a:br>
+              <a:rPr lang="en-US" dirty="0"/>
+            </a:br>
+            <a:r>
+              <a:rPr lang="en-US" dirty="0"/>
+              <a:t>✔ Grant access inside ONE project</a:t>
+            </a:r>
+          </a:p>
+          <a:p>
+            <a:br>
+              <a:rPr lang="en-US" dirty="0"/>
+            </a:br>
+            <a:endParaRPr lang="en-US" dirty="0"/>
+          </a:p>
+          <a:p>
+            <a:r>
+              <a:rPr lang="en-US" b="1" dirty="0"/>
+              <a:t>🌐 7. </a:t>
+            </a:r>
+            <a:r>
+              <a:rPr lang="en-US" b="1" dirty="0" err="1"/>
+              <a:t>ClusterRoleBinding</a:t>
+            </a:r>
+            <a:endParaRPr lang="en-US" b="1" dirty="0"/>
+          </a:p>
+          <a:p>
+            <a:r>
+              <a:rPr lang="en-US" dirty="0"/>
+              <a:t>👉 Example:</a:t>
+            </a:r>
+          </a:p>
+          <a:p>
+            <a:pPr rtl="0"/>
+            <a:r>
+              <a:rPr lang="en-US" sz="1200" kern="1200" dirty="0" err="1">
+                <a:solidFill>
+                  <a:schemeClr val="tx1"/>
+                </a:solidFill>
+                <a:latin typeface="+mn-lt"/>
+                <a:ea typeface="+mn-ea"/>
+                <a:cs typeface="+mn-cs"/>
+              </a:rPr>
+              <a:t>oc</a:t>
+            </a:r>
+            <a:r>
+              <a:rPr lang="en-US" sz="1200" kern="1200" dirty="0">
+                <a:solidFill>
+                  <a:schemeClr val="tx1"/>
+                </a:solidFill>
+                <a:latin typeface="+mn-lt"/>
+                <a:ea typeface="+mn-ea"/>
+                <a:cs typeface="+mn-cs"/>
+              </a:rPr>
+              <a:t> </a:t>
+            </a:r>
+            <a:r>
+              <a:rPr lang="en-US" sz="1200" kern="1200" dirty="0" err="1">
+                <a:solidFill>
+                  <a:schemeClr val="tx1"/>
+                </a:solidFill>
+                <a:latin typeface="+mn-lt"/>
+                <a:ea typeface="+mn-ea"/>
+                <a:cs typeface="+mn-cs"/>
+              </a:rPr>
+              <a:t>adm</a:t>
+            </a:r>
+            <a:r>
+              <a:rPr lang="en-US" sz="1200" kern="1200" dirty="0">
+                <a:solidFill>
+                  <a:schemeClr val="tx1"/>
+                </a:solidFill>
+                <a:latin typeface="+mn-lt"/>
+                <a:ea typeface="+mn-ea"/>
+                <a:cs typeface="+mn-cs"/>
+              </a:rPr>
+              <a:t> policy add-cluster-role-to-user cluster-admin </a:t>
+            </a:r>
+            <a:r>
+              <a:rPr lang="en-US" sz="1200" kern="1200" dirty="0" err="1">
+                <a:solidFill>
+                  <a:schemeClr val="tx1"/>
+                </a:solidFill>
+                <a:latin typeface="+mn-lt"/>
+                <a:ea typeface="+mn-ea"/>
+                <a:cs typeface="+mn-cs"/>
+              </a:rPr>
+              <a:t>venky</a:t>
+            </a:r>
+            <a:endParaRPr lang="en-US" sz="1200" kern="1200" dirty="0">
+              <a:solidFill>
+                <a:schemeClr val="tx1"/>
+              </a:solidFill>
+              <a:latin typeface="+mn-lt"/>
+              <a:ea typeface="+mn-ea"/>
+              <a:cs typeface="+mn-cs"/>
+            </a:endParaRPr>
+          </a:p>
+          <a:p>
+            <a:r>
+              <a:rPr lang="en-US" dirty="0"/>
+              <a:t>Use when:</a:t>
+            </a:r>
+            <a:br>
+              <a:rPr lang="en-US" dirty="0"/>
+            </a:br>
+            <a:r>
+              <a:rPr lang="en-US" dirty="0"/>
+              <a:t>✔ Grant access across ALL projects</a:t>
+            </a:r>
+          </a:p>
+          <a:p>
+            <a:endParaRPr lang="en-US" dirty="0"/>
+          </a:p>
+        </p:txBody>
+      </p:sp>
+      <p:sp>
+        <p:nvSpPr>
+          <p:cNvPr id="4" name="Slide Number Placeholder 3"/>
+          <p:cNvSpPr>
+            <a:spLocks noGrp="1"/>
+          </p:cNvSpPr>
+          <p:nvPr>
+            <p:ph type="sldNum" sz="quarter" idx="5"/>
+          </p:nvPr>
+        </p:nvSpPr>
+        <p:spPr/>
+        <p:txBody>
+          <a:bodyPr/>
+          <a:lstStyle/>
+          <a:p>
+            <a:fld id="{E5F433E1-6874-4E0D-9A73-25A2B6DE9913}" type="slidenum">
+              <a:rPr lang="en-US" smtClean="0"/>
+              <a:t>11</a:t>
+            </a:fld>
+            <a:endParaRPr lang="en-US"/>
+          </a:p>
+        </p:txBody>
+      </p:sp>
+    </p:spTree>
+    <p:extLst>
+      <p:ext uri="{BB962C8B-B14F-4D97-AF65-F5344CB8AC3E}">
+        <p14:creationId xmlns:p14="http://schemas.microsoft.com/office/powerpoint/2010/main" val="3696226115"/>
+      </p:ext>
+    </p:extLst>
+  </p:cSld>
+  <p:clrMapOvr>
+    <a:masterClrMapping/>
+  </p:clrMapOvr>
+</p:notes>
+</file>
+
 <file path=ppt/slideLayouts/slideLayout1.xml><?xml version="1.0" encoding="utf-8"?>
 <p:sldLayout xmlns:a="http://schemas.openxmlformats.org/drawingml/2006/main" xmlns:r="http://schemas.openxmlformats.org/officeDocument/2006/relationships" xmlns:p="http://schemas.openxmlformats.org/presentationml/2006/main" showMasterSp="0" type="title" preserve="1">
   <p:cSld name="Title Slide">
@@ -34298,6 +35076,2876 @@
 <file path=ppt/slides/slide11.xml><?xml version="1.0" encoding="utf-8"?>
 <p:sld xmlns:a="http://schemas.openxmlformats.org/drawingml/2006/main" xmlns:r="http://schemas.openxmlformats.org/officeDocument/2006/relationships" xmlns:p="http://schemas.openxmlformats.org/presentationml/2006/main">
   <p:cSld>
+    <p:spTree>
+      <p:nvGrpSpPr>
+        <p:cNvPr id="1" name=""/>
+        <p:cNvGrpSpPr/>
+        <p:nvPr/>
+      </p:nvGrpSpPr>
+      <p:grpSpPr>
+        <a:xfrm>
+          <a:off x="0" y="0"/>
+          <a:ext cx="0" cy="0"/>
+          <a:chOff x="0" y="0"/>
+          <a:chExt cx="0" cy="0"/>
+        </a:xfrm>
+      </p:grpSpPr>
+      <p:sp>
+        <p:nvSpPr>
+          <p:cNvPr id="2" name="Title 1">
+            <a:extLst>
+              <a:ext uri="{FF2B5EF4-FFF2-40B4-BE49-F238E27FC236}">
+                <a16:creationId xmlns:a16="http://schemas.microsoft.com/office/drawing/2014/main" id="{8372FAC1-8156-B4D5-B3ED-82E7FF2CE0A2}"/>
+              </a:ext>
+            </a:extLst>
+          </p:cNvPr>
+          <p:cNvSpPr>
+            <a:spLocks noGrp="1"/>
+          </p:cNvSpPr>
+          <p:nvPr>
+            <p:ph type="title"/>
+          </p:nvPr>
+        </p:nvSpPr>
+        <p:spPr>
+          <a:xfrm>
+            <a:off x="1484311" y="685800"/>
+            <a:ext cx="10018713" cy="904461"/>
+          </a:xfrm>
+        </p:spPr>
+        <p:txBody>
+          <a:bodyPr/>
+          <a:lstStyle/>
+          <a:p>
+            <a:r>
+              <a:rPr lang="en-US" dirty="0"/>
+              <a:t>RBAC Components Comparison</a:t>
+            </a:r>
+          </a:p>
+        </p:txBody>
+      </p:sp>
+      <p:graphicFrame>
+        <p:nvGraphicFramePr>
+          <p:cNvPr id="4" name="Content Placeholder 3">
+            <a:extLst>
+              <a:ext uri="{FF2B5EF4-FFF2-40B4-BE49-F238E27FC236}">
+                <a16:creationId xmlns:a16="http://schemas.microsoft.com/office/drawing/2014/main" id="{CD8B1F80-B88C-4974-095C-1EB711DCF040}"/>
+              </a:ext>
+            </a:extLst>
+          </p:cNvPr>
+          <p:cNvGraphicFramePr>
+            <a:graphicFrameLocks noGrp="1"/>
+          </p:cNvGraphicFramePr>
+          <p:nvPr>
+            <p:ph idx="1"/>
+            <p:extLst>
+              <p:ext uri="{D42A27DB-BD31-4B8C-83A1-F6EECF244321}">
+                <p14:modId xmlns:p14="http://schemas.microsoft.com/office/powerpoint/2010/main" val="1768609696"/>
+              </p:ext>
+            </p:extLst>
+          </p:nvPr>
+        </p:nvGraphicFramePr>
+        <p:xfrm>
+          <a:off x="1398104" y="1762541"/>
+          <a:ext cx="10349946" cy="4068417"/>
+        </p:xfrm>
+        <a:graphic>
+          <a:graphicData uri="http://schemas.openxmlformats.org/drawingml/2006/table">
+            <a:tbl>
+              <a:tblPr/>
+              <a:tblGrid>
+                <a:gridCol w="1378226">
+                  <a:extLst>
+                    <a:ext uri="{9D8B030D-6E8A-4147-A177-3AD203B41FA5}">
+                      <a16:colId xmlns:a16="http://schemas.microsoft.com/office/drawing/2014/main" val="58066347"/>
+                    </a:ext>
+                  </a:extLst>
+                </a:gridCol>
+                <a:gridCol w="2071756">
+                  <a:extLst>
+                    <a:ext uri="{9D8B030D-6E8A-4147-A177-3AD203B41FA5}">
+                      <a16:colId xmlns:a16="http://schemas.microsoft.com/office/drawing/2014/main" val="898968133"/>
+                    </a:ext>
+                  </a:extLst>
+                </a:gridCol>
+                <a:gridCol w="1287671">
+                  <a:extLst>
+                    <a:ext uri="{9D8B030D-6E8A-4147-A177-3AD203B41FA5}">
+                      <a16:colId xmlns:a16="http://schemas.microsoft.com/office/drawing/2014/main" val="887027925"/>
+                    </a:ext>
+                  </a:extLst>
+                </a:gridCol>
+                <a:gridCol w="1298713">
+                  <a:extLst>
+                    <a:ext uri="{9D8B030D-6E8A-4147-A177-3AD203B41FA5}">
+                      <a16:colId xmlns:a16="http://schemas.microsoft.com/office/drawing/2014/main" val="2458048317"/>
+                    </a:ext>
+                  </a:extLst>
+                </a:gridCol>
+                <a:gridCol w="1959915">
+                  <a:extLst>
+                    <a:ext uri="{9D8B030D-6E8A-4147-A177-3AD203B41FA5}">
+                      <a16:colId xmlns:a16="http://schemas.microsoft.com/office/drawing/2014/main" val="2952246815"/>
+                    </a:ext>
+                  </a:extLst>
+                </a:gridCol>
+                <a:gridCol w="2353665">
+                  <a:extLst>
+                    <a:ext uri="{9D8B030D-6E8A-4147-A177-3AD203B41FA5}">
+                      <a16:colId xmlns:a16="http://schemas.microsoft.com/office/drawing/2014/main" val="731340801"/>
+                    </a:ext>
+                  </a:extLst>
+                </a:gridCol>
+              </a:tblGrid>
+              <a:tr h="343120">
+                <a:tc>
+                  <a:txBody>
+                    <a:bodyPr/>
+                    <a:lstStyle/>
+                    <a:p>
+                      <a:pPr>
+                        <a:buNone/>
+                      </a:pPr>
+                      <a:r>
+                        <a:rPr lang="en-US" sz="1200"/>
+                        <a:t>Component</a:t>
+                      </a:r>
+                    </a:p>
+                  </a:txBody>
+                  <a:tcPr marL="37641" marR="37641" marT="18820" marB="18820" anchor="ctr">
+                    <a:lnL w="12700" cap="flat" cmpd="sng" algn="ctr">
+                      <a:solidFill>
+                        <a:schemeClr val="tx1"/>
+                      </a:solidFill>
+                      <a:prstDash val="solid"/>
+                      <a:round/>
+                      <a:headEnd type="none" w="med" len="med"/>
+                      <a:tailEnd type="none" w="med" len="med"/>
+                    </a:lnL>
+                    <a:lnR w="12700" cap="flat" cmpd="sng" algn="ctr">
+                      <a:solidFill>
+                        <a:schemeClr val="tx1"/>
+                      </a:solidFill>
+                      <a:prstDash val="solid"/>
+                      <a:round/>
+                      <a:headEnd type="none" w="med" len="med"/>
+                      <a:tailEnd type="none" w="med" len="med"/>
+                    </a:lnR>
+                    <a:lnT w="12700" cap="flat" cmpd="sng" algn="ctr">
+                      <a:solidFill>
+                        <a:schemeClr val="tx1"/>
+                      </a:solidFill>
+                      <a:prstDash val="solid"/>
+                      <a:round/>
+                      <a:headEnd type="none" w="med" len="med"/>
+                      <a:tailEnd type="none" w="med" len="med"/>
+                    </a:lnT>
+                    <a:lnB w="12700" cap="flat" cmpd="sng" algn="ctr">
+                      <a:solidFill>
+                        <a:schemeClr val="tx1"/>
+                      </a:solidFill>
+                      <a:prstDash val="solid"/>
+                      <a:round/>
+                      <a:headEnd type="none" w="med" len="med"/>
+                      <a:tailEnd type="none" w="med" len="med"/>
+                    </a:lnB>
+                    <a:noFill/>
+                  </a:tcPr>
+                </a:tc>
+                <a:tc>
+                  <a:txBody>
+                    <a:bodyPr/>
+                    <a:lstStyle/>
+                    <a:p>
+                      <a:pPr>
+                        <a:buNone/>
+                      </a:pPr>
+                      <a:r>
+                        <a:rPr lang="en-US" sz="1200"/>
+                        <a:t>What It Is</a:t>
+                      </a:r>
+                    </a:p>
+                  </a:txBody>
+                  <a:tcPr marL="37641" marR="37641" marT="18820" marB="18820" anchor="ctr">
+                    <a:lnL w="12700" cap="flat" cmpd="sng" algn="ctr">
+                      <a:solidFill>
+                        <a:schemeClr val="tx1"/>
+                      </a:solidFill>
+                      <a:prstDash val="solid"/>
+                      <a:round/>
+                      <a:headEnd type="none" w="med" len="med"/>
+                      <a:tailEnd type="none" w="med" len="med"/>
+                    </a:lnL>
+                    <a:lnR w="12700" cap="flat" cmpd="sng" algn="ctr">
+                      <a:solidFill>
+                        <a:schemeClr val="tx1"/>
+                      </a:solidFill>
+                      <a:prstDash val="solid"/>
+                      <a:round/>
+                      <a:headEnd type="none" w="med" len="med"/>
+                      <a:tailEnd type="none" w="med" len="med"/>
+                    </a:lnR>
+                    <a:lnT w="12700" cap="flat" cmpd="sng" algn="ctr">
+                      <a:solidFill>
+                        <a:schemeClr val="tx1"/>
+                      </a:solidFill>
+                      <a:prstDash val="solid"/>
+                      <a:round/>
+                      <a:headEnd type="none" w="med" len="med"/>
+                      <a:tailEnd type="none" w="med" len="med"/>
+                    </a:lnT>
+                    <a:lnB w="12700" cap="flat" cmpd="sng" algn="ctr">
+                      <a:solidFill>
+                        <a:schemeClr val="tx1"/>
+                      </a:solidFill>
+                      <a:prstDash val="solid"/>
+                      <a:round/>
+                      <a:headEnd type="none" w="med" len="med"/>
+                      <a:tailEnd type="none" w="med" len="med"/>
+                    </a:lnB>
+                    <a:noFill/>
+                  </a:tcPr>
+                </a:tc>
+                <a:tc>
+                  <a:txBody>
+                    <a:bodyPr/>
+                    <a:lstStyle/>
+                    <a:p>
+                      <a:pPr>
+                        <a:buNone/>
+                      </a:pPr>
+                      <a:r>
+                        <a:rPr lang="en-US" sz="1200"/>
+                        <a:t>Used For</a:t>
+                      </a:r>
+                    </a:p>
+                  </a:txBody>
+                  <a:tcPr marL="37641" marR="37641" marT="18820" marB="18820" anchor="ctr">
+                    <a:lnL w="12700" cap="flat" cmpd="sng" algn="ctr">
+                      <a:solidFill>
+                        <a:schemeClr val="tx1"/>
+                      </a:solidFill>
+                      <a:prstDash val="solid"/>
+                      <a:round/>
+                      <a:headEnd type="none" w="med" len="med"/>
+                      <a:tailEnd type="none" w="med" len="med"/>
+                    </a:lnL>
+                    <a:lnR w="12700" cap="flat" cmpd="sng" algn="ctr">
+                      <a:solidFill>
+                        <a:schemeClr val="tx1"/>
+                      </a:solidFill>
+                      <a:prstDash val="solid"/>
+                      <a:round/>
+                      <a:headEnd type="none" w="med" len="med"/>
+                      <a:tailEnd type="none" w="med" len="med"/>
+                    </a:lnR>
+                    <a:lnT w="12700" cap="flat" cmpd="sng" algn="ctr">
+                      <a:solidFill>
+                        <a:schemeClr val="tx1"/>
+                      </a:solidFill>
+                      <a:prstDash val="solid"/>
+                      <a:round/>
+                      <a:headEnd type="none" w="med" len="med"/>
+                      <a:tailEnd type="none" w="med" len="med"/>
+                    </a:lnT>
+                    <a:lnB w="12700" cap="flat" cmpd="sng" algn="ctr">
+                      <a:solidFill>
+                        <a:schemeClr val="tx1"/>
+                      </a:solidFill>
+                      <a:prstDash val="solid"/>
+                      <a:round/>
+                      <a:headEnd type="none" w="med" len="med"/>
+                      <a:tailEnd type="none" w="med" len="med"/>
+                    </a:lnB>
+                    <a:noFill/>
+                  </a:tcPr>
+                </a:tc>
+                <a:tc>
+                  <a:txBody>
+                    <a:bodyPr/>
+                    <a:lstStyle/>
+                    <a:p>
+                      <a:pPr>
+                        <a:buNone/>
+                      </a:pPr>
+                      <a:r>
+                        <a:rPr lang="en-US" sz="1200"/>
+                        <a:t>Scope</a:t>
+                      </a:r>
+                    </a:p>
+                  </a:txBody>
+                  <a:tcPr marL="37641" marR="37641" marT="18820" marB="18820" anchor="ctr">
+                    <a:lnL w="12700" cap="flat" cmpd="sng" algn="ctr">
+                      <a:solidFill>
+                        <a:schemeClr val="tx1"/>
+                      </a:solidFill>
+                      <a:prstDash val="solid"/>
+                      <a:round/>
+                      <a:headEnd type="none" w="med" len="med"/>
+                      <a:tailEnd type="none" w="med" len="med"/>
+                    </a:lnL>
+                    <a:lnR w="12700" cap="flat" cmpd="sng" algn="ctr">
+                      <a:solidFill>
+                        <a:schemeClr val="tx1"/>
+                      </a:solidFill>
+                      <a:prstDash val="solid"/>
+                      <a:round/>
+                      <a:headEnd type="none" w="med" len="med"/>
+                      <a:tailEnd type="none" w="med" len="med"/>
+                    </a:lnR>
+                    <a:lnT w="12700" cap="flat" cmpd="sng" algn="ctr">
+                      <a:solidFill>
+                        <a:schemeClr val="tx1"/>
+                      </a:solidFill>
+                      <a:prstDash val="solid"/>
+                      <a:round/>
+                      <a:headEnd type="none" w="med" len="med"/>
+                      <a:tailEnd type="none" w="med" len="med"/>
+                    </a:lnT>
+                    <a:lnB w="12700" cap="flat" cmpd="sng" algn="ctr">
+                      <a:solidFill>
+                        <a:schemeClr val="tx1"/>
+                      </a:solidFill>
+                      <a:prstDash val="solid"/>
+                      <a:round/>
+                      <a:headEnd type="none" w="med" len="med"/>
+                      <a:tailEnd type="none" w="med" len="med"/>
+                    </a:lnB>
+                    <a:noFill/>
+                  </a:tcPr>
+                </a:tc>
+                <a:tc>
+                  <a:txBody>
+                    <a:bodyPr/>
+                    <a:lstStyle/>
+                    <a:p>
+                      <a:pPr>
+                        <a:buNone/>
+                      </a:pPr>
+                      <a:r>
+                        <a:rPr lang="en-US" sz="1200"/>
+                        <a:t>Example</a:t>
+                      </a:r>
+                    </a:p>
+                  </a:txBody>
+                  <a:tcPr marL="37641" marR="37641" marT="18820" marB="18820" anchor="ctr">
+                    <a:lnL w="12700" cap="flat" cmpd="sng" algn="ctr">
+                      <a:solidFill>
+                        <a:schemeClr val="tx1"/>
+                      </a:solidFill>
+                      <a:prstDash val="solid"/>
+                      <a:round/>
+                      <a:headEnd type="none" w="med" len="med"/>
+                      <a:tailEnd type="none" w="med" len="med"/>
+                    </a:lnL>
+                    <a:lnR w="12700" cap="flat" cmpd="sng" algn="ctr">
+                      <a:solidFill>
+                        <a:schemeClr val="tx1"/>
+                      </a:solidFill>
+                      <a:prstDash val="solid"/>
+                      <a:round/>
+                      <a:headEnd type="none" w="med" len="med"/>
+                      <a:tailEnd type="none" w="med" len="med"/>
+                    </a:lnR>
+                    <a:lnT w="12700" cap="flat" cmpd="sng" algn="ctr">
+                      <a:solidFill>
+                        <a:schemeClr val="tx1"/>
+                      </a:solidFill>
+                      <a:prstDash val="solid"/>
+                      <a:round/>
+                      <a:headEnd type="none" w="med" len="med"/>
+                      <a:tailEnd type="none" w="med" len="med"/>
+                    </a:lnT>
+                    <a:lnB w="12700" cap="flat" cmpd="sng" algn="ctr">
+                      <a:solidFill>
+                        <a:schemeClr val="tx1"/>
+                      </a:solidFill>
+                      <a:prstDash val="solid"/>
+                      <a:round/>
+                      <a:headEnd type="none" w="med" len="med"/>
+                      <a:tailEnd type="none" w="med" len="med"/>
+                    </a:lnB>
+                    <a:noFill/>
+                  </a:tcPr>
+                </a:tc>
+                <a:tc>
+                  <a:txBody>
+                    <a:bodyPr/>
+                    <a:lstStyle/>
+                    <a:p>
+                      <a:pPr>
+                        <a:buNone/>
+                      </a:pPr>
+                      <a:r>
+                        <a:rPr lang="en-US" sz="1200"/>
+                        <a:t>When You Need It</a:t>
+                      </a:r>
+                    </a:p>
+                  </a:txBody>
+                  <a:tcPr marL="37641" marR="37641" marT="18820" marB="18820" anchor="ctr">
+                    <a:lnL w="12700" cap="flat" cmpd="sng" algn="ctr">
+                      <a:solidFill>
+                        <a:schemeClr val="tx1"/>
+                      </a:solidFill>
+                      <a:prstDash val="solid"/>
+                      <a:round/>
+                      <a:headEnd type="none" w="med" len="med"/>
+                      <a:tailEnd type="none" w="med" len="med"/>
+                    </a:lnL>
+                    <a:lnR w="12700" cap="flat" cmpd="sng" algn="ctr">
+                      <a:solidFill>
+                        <a:schemeClr val="tx1"/>
+                      </a:solidFill>
+                      <a:prstDash val="solid"/>
+                      <a:round/>
+                      <a:headEnd type="none" w="med" len="med"/>
+                      <a:tailEnd type="none" w="med" len="med"/>
+                    </a:lnR>
+                    <a:lnT w="12700" cap="flat" cmpd="sng" algn="ctr">
+                      <a:solidFill>
+                        <a:schemeClr val="tx1"/>
+                      </a:solidFill>
+                      <a:prstDash val="solid"/>
+                      <a:round/>
+                      <a:headEnd type="none" w="med" len="med"/>
+                      <a:tailEnd type="none" w="med" len="med"/>
+                    </a:lnT>
+                    <a:lnB w="12700" cap="flat" cmpd="sng" algn="ctr">
+                      <a:solidFill>
+                        <a:schemeClr val="tx1"/>
+                      </a:solidFill>
+                      <a:prstDash val="solid"/>
+                      <a:round/>
+                      <a:headEnd type="none" w="med" len="med"/>
+                      <a:tailEnd type="none" w="med" len="med"/>
+                    </a:lnB>
+                    <a:noFill/>
+                  </a:tcPr>
+                </a:tc>
+                <a:extLst>
+                  <a:ext uri="{0D108BD9-81ED-4DB2-BD59-A6C34878D82A}">
+                    <a16:rowId xmlns:a16="http://schemas.microsoft.com/office/drawing/2014/main" val="2820248138"/>
+                  </a:ext>
+                </a:extLst>
+              </a:tr>
+              <a:tr h="490171">
+                <a:tc>
+                  <a:txBody>
+                    <a:bodyPr/>
+                    <a:lstStyle/>
+                    <a:p>
+                      <a:pPr>
+                        <a:buNone/>
+                      </a:pPr>
+                      <a:r>
+                        <a:rPr lang="en-US" sz="1200" b="1"/>
+                        <a:t>User</a:t>
+                      </a:r>
+                      <a:endParaRPr lang="en-US" sz="1200"/>
+                    </a:p>
+                  </a:txBody>
+                  <a:tcPr marL="37641" marR="37641" marT="18820" marB="18820" anchor="ctr">
+                    <a:lnL w="12700" cap="flat" cmpd="sng" algn="ctr">
+                      <a:solidFill>
+                        <a:schemeClr val="tx1"/>
+                      </a:solidFill>
+                      <a:prstDash val="solid"/>
+                      <a:round/>
+                      <a:headEnd type="none" w="med" len="med"/>
+                      <a:tailEnd type="none" w="med" len="med"/>
+                    </a:lnL>
+                    <a:lnR w="12700" cap="flat" cmpd="sng" algn="ctr">
+                      <a:solidFill>
+                        <a:schemeClr val="tx1"/>
+                      </a:solidFill>
+                      <a:prstDash val="solid"/>
+                      <a:round/>
+                      <a:headEnd type="none" w="med" len="med"/>
+                      <a:tailEnd type="none" w="med" len="med"/>
+                    </a:lnR>
+                    <a:lnT w="12700" cap="flat" cmpd="sng" algn="ctr">
+                      <a:solidFill>
+                        <a:schemeClr val="tx1"/>
+                      </a:solidFill>
+                      <a:prstDash val="solid"/>
+                      <a:round/>
+                      <a:headEnd type="none" w="med" len="med"/>
+                      <a:tailEnd type="none" w="med" len="med"/>
+                    </a:lnT>
+                    <a:lnB w="12700" cap="flat" cmpd="sng" algn="ctr">
+                      <a:solidFill>
+                        <a:schemeClr val="tx1"/>
+                      </a:solidFill>
+                      <a:prstDash val="solid"/>
+                      <a:round/>
+                      <a:headEnd type="none" w="med" len="med"/>
+                      <a:tailEnd type="none" w="med" len="med"/>
+                    </a:lnB>
+                    <a:noFill/>
+                  </a:tcPr>
+                </a:tc>
+                <a:tc>
+                  <a:txBody>
+                    <a:bodyPr/>
+                    <a:lstStyle/>
+                    <a:p>
+                      <a:pPr>
+                        <a:buNone/>
+                      </a:pPr>
+                      <a:r>
+                        <a:rPr lang="en-US" sz="1200"/>
+                        <a:t>Individual identity (human login)</a:t>
+                      </a:r>
+                    </a:p>
+                  </a:txBody>
+                  <a:tcPr marL="37641" marR="37641" marT="18820" marB="18820" anchor="ctr">
+                    <a:lnL w="12700" cap="flat" cmpd="sng" algn="ctr">
+                      <a:solidFill>
+                        <a:schemeClr val="tx1"/>
+                      </a:solidFill>
+                      <a:prstDash val="solid"/>
+                      <a:round/>
+                      <a:headEnd type="none" w="med" len="med"/>
+                      <a:tailEnd type="none" w="med" len="med"/>
+                    </a:lnL>
+                    <a:lnR w="12700" cap="flat" cmpd="sng" algn="ctr">
+                      <a:solidFill>
+                        <a:schemeClr val="tx1"/>
+                      </a:solidFill>
+                      <a:prstDash val="solid"/>
+                      <a:round/>
+                      <a:headEnd type="none" w="med" len="med"/>
+                      <a:tailEnd type="none" w="med" len="med"/>
+                    </a:lnR>
+                    <a:lnT w="12700" cap="flat" cmpd="sng" algn="ctr">
+                      <a:solidFill>
+                        <a:schemeClr val="tx1"/>
+                      </a:solidFill>
+                      <a:prstDash val="solid"/>
+                      <a:round/>
+                      <a:headEnd type="none" w="med" len="med"/>
+                      <a:tailEnd type="none" w="med" len="med"/>
+                    </a:lnT>
+                    <a:lnB w="12700" cap="flat" cmpd="sng" algn="ctr">
+                      <a:solidFill>
+                        <a:schemeClr val="tx1"/>
+                      </a:solidFill>
+                      <a:prstDash val="solid"/>
+                      <a:round/>
+                      <a:headEnd type="none" w="med" len="med"/>
+                      <a:tailEnd type="none" w="med" len="med"/>
+                    </a:lnB>
+                    <a:noFill/>
+                  </a:tcPr>
+                </a:tc>
+                <a:tc>
+                  <a:txBody>
+                    <a:bodyPr/>
+                    <a:lstStyle/>
+                    <a:p>
+                      <a:pPr>
+                        <a:buNone/>
+                      </a:pPr>
+                      <a:r>
+                        <a:rPr lang="en-US" sz="1200"/>
+                        <a:t>Login &amp; access to cluster</a:t>
+                      </a:r>
+                    </a:p>
+                  </a:txBody>
+                  <a:tcPr marL="37641" marR="37641" marT="18820" marB="18820" anchor="ctr">
+                    <a:lnL w="12700" cap="flat" cmpd="sng" algn="ctr">
+                      <a:solidFill>
+                        <a:schemeClr val="tx1"/>
+                      </a:solidFill>
+                      <a:prstDash val="solid"/>
+                      <a:round/>
+                      <a:headEnd type="none" w="med" len="med"/>
+                      <a:tailEnd type="none" w="med" len="med"/>
+                    </a:lnL>
+                    <a:lnR w="12700" cap="flat" cmpd="sng" algn="ctr">
+                      <a:solidFill>
+                        <a:schemeClr val="tx1"/>
+                      </a:solidFill>
+                      <a:prstDash val="solid"/>
+                      <a:round/>
+                      <a:headEnd type="none" w="med" len="med"/>
+                      <a:tailEnd type="none" w="med" len="med"/>
+                    </a:lnR>
+                    <a:lnT w="12700" cap="flat" cmpd="sng" algn="ctr">
+                      <a:solidFill>
+                        <a:schemeClr val="tx1"/>
+                      </a:solidFill>
+                      <a:prstDash val="solid"/>
+                      <a:round/>
+                      <a:headEnd type="none" w="med" len="med"/>
+                      <a:tailEnd type="none" w="med" len="med"/>
+                    </a:lnT>
+                    <a:lnB w="12700" cap="flat" cmpd="sng" algn="ctr">
+                      <a:solidFill>
+                        <a:schemeClr val="tx1"/>
+                      </a:solidFill>
+                      <a:prstDash val="solid"/>
+                      <a:round/>
+                      <a:headEnd type="none" w="med" len="med"/>
+                      <a:tailEnd type="none" w="med" len="med"/>
+                    </a:lnB>
+                    <a:noFill/>
+                  </a:tcPr>
+                </a:tc>
+                <a:tc>
+                  <a:txBody>
+                    <a:bodyPr/>
+                    <a:lstStyle/>
+                    <a:p>
+                      <a:pPr>
+                        <a:buNone/>
+                      </a:pPr>
+                      <a:r>
+                        <a:rPr lang="en-US" sz="1200"/>
+                        <a:t>External (via IdP)</a:t>
+                      </a:r>
+                    </a:p>
+                  </a:txBody>
+                  <a:tcPr marL="37641" marR="37641" marT="18820" marB="18820" anchor="ctr">
+                    <a:lnL w="12700" cap="flat" cmpd="sng" algn="ctr">
+                      <a:solidFill>
+                        <a:schemeClr val="tx1"/>
+                      </a:solidFill>
+                      <a:prstDash val="solid"/>
+                      <a:round/>
+                      <a:headEnd type="none" w="med" len="med"/>
+                      <a:tailEnd type="none" w="med" len="med"/>
+                    </a:lnL>
+                    <a:lnR w="12700" cap="flat" cmpd="sng" algn="ctr">
+                      <a:solidFill>
+                        <a:schemeClr val="tx1"/>
+                      </a:solidFill>
+                      <a:prstDash val="solid"/>
+                      <a:round/>
+                      <a:headEnd type="none" w="med" len="med"/>
+                      <a:tailEnd type="none" w="med" len="med"/>
+                    </a:lnR>
+                    <a:lnT w="12700" cap="flat" cmpd="sng" algn="ctr">
+                      <a:solidFill>
+                        <a:schemeClr val="tx1"/>
+                      </a:solidFill>
+                      <a:prstDash val="solid"/>
+                      <a:round/>
+                      <a:headEnd type="none" w="med" len="med"/>
+                      <a:tailEnd type="none" w="med" len="med"/>
+                    </a:lnT>
+                    <a:lnB w="12700" cap="flat" cmpd="sng" algn="ctr">
+                      <a:solidFill>
+                        <a:schemeClr val="tx1"/>
+                      </a:solidFill>
+                      <a:prstDash val="solid"/>
+                      <a:round/>
+                      <a:headEnd type="none" w="med" len="med"/>
+                      <a:tailEnd type="none" w="med" len="med"/>
+                    </a:lnB>
+                    <a:noFill/>
+                  </a:tcPr>
+                </a:tc>
+                <a:tc>
+                  <a:txBody>
+                    <a:bodyPr/>
+                    <a:lstStyle/>
+                    <a:p>
+                      <a:pPr>
+                        <a:buNone/>
+                      </a:pPr>
+                      <a:r>
+                        <a:rPr lang="en-US" sz="1200">
+                          <a:latin typeface="Courier New" panose="02070309020205020404" pitchFamily="49" charset="0"/>
+                        </a:rPr>
+                        <a:t>student1</a:t>
+                      </a:r>
+                      <a:r>
+                        <a:rPr lang="en-US" sz="1200"/>
+                        <a:t>, </a:t>
+                      </a:r>
+                      <a:r>
+                        <a:rPr lang="en-US" sz="1200">
+                          <a:latin typeface="Courier New" panose="02070309020205020404" pitchFamily="49" charset="0"/>
+                        </a:rPr>
+                        <a:t>venky</a:t>
+                      </a:r>
+                      <a:endParaRPr lang="en-US" sz="1200"/>
+                    </a:p>
+                  </a:txBody>
+                  <a:tcPr marL="37641" marR="37641" marT="18820" marB="18820" anchor="ctr">
+                    <a:lnL w="12700" cap="flat" cmpd="sng" algn="ctr">
+                      <a:solidFill>
+                        <a:schemeClr val="tx1"/>
+                      </a:solidFill>
+                      <a:prstDash val="solid"/>
+                      <a:round/>
+                      <a:headEnd type="none" w="med" len="med"/>
+                      <a:tailEnd type="none" w="med" len="med"/>
+                    </a:lnL>
+                    <a:lnR w="12700" cap="flat" cmpd="sng" algn="ctr">
+                      <a:solidFill>
+                        <a:schemeClr val="tx1"/>
+                      </a:solidFill>
+                      <a:prstDash val="solid"/>
+                      <a:round/>
+                      <a:headEnd type="none" w="med" len="med"/>
+                      <a:tailEnd type="none" w="med" len="med"/>
+                    </a:lnR>
+                    <a:lnT w="12700" cap="flat" cmpd="sng" algn="ctr">
+                      <a:solidFill>
+                        <a:schemeClr val="tx1"/>
+                      </a:solidFill>
+                      <a:prstDash val="solid"/>
+                      <a:round/>
+                      <a:headEnd type="none" w="med" len="med"/>
+                      <a:tailEnd type="none" w="med" len="med"/>
+                    </a:lnT>
+                    <a:lnB w="12700" cap="flat" cmpd="sng" algn="ctr">
+                      <a:solidFill>
+                        <a:schemeClr val="tx1"/>
+                      </a:solidFill>
+                      <a:prstDash val="solid"/>
+                      <a:round/>
+                      <a:headEnd type="none" w="med" len="med"/>
+                      <a:tailEnd type="none" w="med" len="med"/>
+                    </a:lnB>
+                    <a:noFill/>
+                  </a:tcPr>
+                </a:tc>
+                <a:tc>
+                  <a:txBody>
+                    <a:bodyPr/>
+                    <a:lstStyle/>
+                    <a:p>
+                      <a:pPr>
+                        <a:buNone/>
+                      </a:pPr>
+                      <a:r>
+                        <a:rPr lang="en-US" sz="1200"/>
+                        <a:t>When a person needs access to OpenShift</a:t>
+                      </a:r>
+                    </a:p>
+                  </a:txBody>
+                  <a:tcPr marL="37641" marR="37641" marT="18820" marB="18820" anchor="ctr">
+                    <a:lnL w="12700" cap="flat" cmpd="sng" algn="ctr">
+                      <a:solidFill>
+                        <a:schemeClr val="tx1"/>
+                      </a:solidFill>
+                      <a:prstDash val="solid"/>
+                      <a:round/>
+                      <a:headEnd type="none" w="med" len="med"/>
+                      <a:tailEnd type="none" w="med" len="med"/>
+                    </a:lnL>
+                    <a:lnR w="12700" cap="flat" cmpd="sng" algn="ctr">
+                      <a:solidFill>
+                        <a:schemeClr val="tx1"/>
+                      </a:solidFill>
+                      <a:prstDash val="solid"/>
+                      <a:round/>
+                      <a:headEnd type="none" w="med" len="med"/>
+                      <a:tailEnd type="none" w="med" len="med"/>
+                    </a:lnR>
+                    <a:lnT w="12700" cap="flat" cmpd="sng" algn="ctr">
+                      <a:solidFill>
+                        <a:schemeClr val="tx1"/>
+                      </a:solidFill>
+                      <a:prstDash val="solid"/>
+                      <a:round/>
+                      <a:headEnd type="none" w="med" len="med"/>
+                      <a:tailEnd type="none" w="med" len="med"/>
+                    </a:lnT>
+                    <a:lnB w="12700" cap="flat" cmpd="sng" algn="ctr">
+                      <a:solidFill>
+                        <a:schemeClr val="tx1"/>
+                      </a:solidFill>
+                      <a:prstDash val="solid"/>
+                      <a:round/>
+                      <a:headEnd type="none" w="med" len="med"/>
+                      <a:tailEnd type="none" w="med" len="med"/>
+                    </a:lnB>
+                    <a:noFill/>
+                  </a:tcPr>
+                </a:tc>
+                <a:extLst>
+                  <a:ext uri="{0D108BD9-81ED-4DB2-BD59-A6C34878D82A}">
+                    <a16:rowId xmlns:a16="http://schemas.microsoft.com/office/drawing/2014/main" val="1324167098"/>
+                  </a:ext>
+                </a:extLst>
+              </a:tr>
+              <a:tr h="637221">
+                <a:tc>
+                  <a:txBody>
+                    <a:bodyPr/>
+                    <a:lstStyle/>
+                    <a:p>
+                      <a:pPr>
+                        <a:buNone/>
+                      </a:pPr>
+                      <a:r>
+                        <a:rPr lang="en-US" sz="1200" b="1"/>
+                        <a:t>Group</a:t>
+                      </a:r>
+                      <a:endParaRPr lang="en-US" sz="1200"/>
+                    </a:p>
+                  </a:txBody>
+                  <a:tcPr marL="37641" marR="37641" marT="18820" marB="18820" anchor="ctr">
+                    <a:lnL w="12700" cap="flat" cmpd="sng" algn="ctr">
+                      <a:solidFill>
+                        <a:schemeClr val="tx1"/>
+                      </a:solidFill>
+                      <a:prstDash val="solid"/>
+                      <a:round/>
+                      <a:headEnd type="none" w="med" len="med"/>
+                      <a:tailEnd type="none" w="med" len="med"/>
+                    </a:lnL>
+                    <a:lnR w="12700" cap="flat" cmpd="sng" algn="ctr">
+                      <a:solidFill>
+                        <a:schemeClr val="tx1"/>
+                      </a:solidFill>
+                      <a:prstDash val="solid"/>
+                      <a:round/>
+                      <a:headEnd type="none" w="med" len="med"/>
+                      <a:tailEnd type="none" w="med" len="med"/>
+                    </a:lnR>
+                    <a:lnT w="12700" cap="flat" cmpd="sng" algn="ctr">
+                      <a:solidFill>
+                        <a:schemeClr val="tx1"/>
+                      </a:solidFill>
+                      <a:prstDash val="solid"/>
+                      <a:round/>
+                      <a:headEnd type="none" w="med" len="med"/>
+                      <a:tailEnd type="none" w="med" len="med"/>
+                    </a:lnT>
+                    <a:lnB w="12700" cap="flat" cmpd="sng" algn="ctr">
+                      <a:solidFill>
+                        <a:schemeClr val="tx1"/>
+                      </a:solidFill>
+                      <a:prstDash val="solid"/>
+                      <a:round/>
+                      <a:headEnd type="none" w="med" len="med"/>
+                      <a:tailEnd type="none" w="med" len="med"/>
+                    </a:lnB>
+                    <a:noFill/>
+                  </a:tcPr>
+                </a:tc>
+                <a:tc>
+                  <a:txBody>
+                    <a:bodyPr/>
+                    <a:lstStyle/>
+                    <a:p>
+                      <a:pPr>
+                        <a:buNone/>
+                      </a:pPr>
+                      <a:r>
+                        <a:rPr lang="en-US" sz="1200"/>
+                        <a:t>Collection of users</a:t>
+                      </a:r>
+                    </a:p>
+                  </a:txBody>
+                  <a:tcPr marL="37641" marR="37641" marT="18820" marB="18820" anchor="ctr">
+                    <a:lnL w="12700" cap="flat" cmpd="sng" algn="ctr">
+                      <a:solidFill>
+                        <a:schemeClr val="tx1"/>
+                      </a:solidFill>
+                      <a:prstDash val="solid"/>
+                      <a:round/>
+                      <a:headEnd type="none" w="med" len="med"/>
+                      <a:tailEnd type="none" w="med" len="med"/>
+                    </a:lnL>
+                    <a:lnR w="12700" cap="flat" cmpd="sng" algn="ctr">
+                      <a:solidFill>
+                        <a:schemeClr val="tx1"/>
+                      </a:solidFill>
+                      <a:prstDash val="solid"/>
+                      <a:round/>
+                      <a:headEnd type="none" w="med" len="med"/>
+                      <a:tailEnd type="none" w="med" len="med"/>
+                    </a:lnR>
+                    <a:lnT w="12700" cap="flat" cmpd="sng" algn="ctr">
+                      <a:solidFill>
+                        <a:schemeClr val="tx1"/>
+                      </a:solidFill>
+                      <a:prstDash val="solid"/>
+                      <a:round/>
+                      <a:headEnd type="none" w="med" len="med"/>
+                      <a:tailEnd type="none" w="med" len="med"/>
+                    </a:lnT>
+                    <a:lnB w="12700" cap="flat" cmpd="sng" algn="ctr">
+                      <a:solidFill>
+                        <a:schemeClr val="tx1"/>
+                      </a:solidFill>
+                      <a:prstDash val="solid"/>
+                      <a:round/>
+                      <a:headEnd type="none" w="med" len="med"/>
+                      <a:tailEnd type="none" w="med" len="med"/>
+                    </a:lnB>
+                    <a:noFill/>
+                  </a:tcPr>
+                </a:tc>
+                <a:tc>
+                  <a:txBody>
+                    <a:bodyPr/>
+                    <a:lstStyle/>
+                    <a:p>
+                      <a:pPr>
+                        <a:buNone/>
+                      </a:pPr>
+                      <a:r>
+                        <a:rPr lang="en-US" sz="1200" dirty="0"/>
+                        <a:t>Manage access in bulk</a:t>
+                      </a:r>
+                    </a:p>
+                  </a:txBody>
+                  <a:tcPr marL="37641" marR="37641" marT="18820" marB="18820" anchor="ctr">
+                    <a:lnL w="12700" cap="flat" cmpd="sng" algn="ctr">
+                      <a:solidFill>
+                        <a:schemeClr val="tx1"/>
+                      </a:solidFill>
+                      <a:prstDash val="solid"/>
+                      <a:round/>
+                      <a:headEnd type="none" w="med" len="med"/>
+                      <a:tailEnd type="none" w="med" len="med"/>
+                    </a:lnL>
+                    <a:lnR w="12700" cap="flat" cmpd="sng" algn="ctr">
+                      <a:solidFill>
+                        <a:schemeClr val="tx1"/>
+                      </a:solidFill>
+                      <a:prstDash val="solid"/>
+                      <a:round/>
+                      <a:headEnd type="none" w="med" len="med"/>
+                      <a:tailEnd type="none" w="med" len="med"/>
+                    </a:lnR>
+                    <a:lnT w="12700" cap="flat" cmpd="sng" algn="ctr">
+                      <a:solidFill>
+                        <a:schemeClr val="tx1"/>
+                      </a:solidFill>
+                      <a:prstDash val="solid"/>
+                      <a:round/>
+                      <a:headEnd type="none" w="med" len="med"/>
+                      <a:tailEnd type="none" w="med" len="med"/>
+                    </a:lnT>
+                    <a:lnB w="12700" cap="flat" cmpd="sng" algn="ctr">
+                      <a:solidFill>
+                        <a:schemeClr val="tx1"/>
+                      </a:solidFill>
+                      <a:prstDash val="solid"/>
+                      <a:round/>
+                      <a:headEnd type="none" w="med" len="med"/>
+                      <a:tailEnd type="none" w="med" len="med"/>
+                    </a:lnB>
+                    <a:noFill/>
+                  </a:tcPr>
+                </a:tc>
+                <a:tc>
+                  <a:txBody>
+                    <a:bodyPr/>
+                    <a:lstStyle/>
+                    <a:p>
+                      <a:pPr>
+                        <a:buNone/>
+                      </a:pPr>
+                      <a:r>
+                        <a:rPr lang="en-US" sz="1200"/>
+                        <a:t>Project / Cluster</a:t>
+                      </a:r>
+                    </a:p>
+                  </a:txBody>
+                  <a:tcPr marL="37641" marR="37641" marT="18820" marB="18820" anchor="ctr">
+                    <a:lnL w="12700" cap="flat" cmpd="sng" algn="ctr">
+                      <a:solidFill>
+                        <a:schemeClr val="tx1"/>
+                      </a:solidFill>
+                      <a:prstDash val="solid"/>
+                      <a:round/>
+                      <a:headEnd type="none" w="med" len="med"/>
+                      <a:tailEnd type="none" w="med" len="med"/>
+                    </a:lnL>
+                    <a:lnR w="12700" cap="flat" cmpd="sng" algn="ctr">
+                      <a:solidFill>
+                        <a:schemeClr val="tx1"/>
+                      </a:solidFill>
+                      <a:prstDash val="solid"/>
+                      <a:round/>
+                      <a:headEnd type="none" w="med" len="med"/>
+                      <a:tailEnd type="none" w="med" len="med"/>
+                    </a:lnR>
+                    <a:lnT w="12700" cap="flat" cmpd="sng" algn="ctr">
+                      <a:solidFill>
+                        <a:schemeClr val="tx1"/>
+                      </a:solidFill>
+                      <a:prstDash val="solid"/>
+                      <a:round/>
+                      <a:headEnd type="none" w="med" len="med"/>
+                      <a:tailEnd type="none" w="med" len="med"/>
+                    </a:lnT>
+                    <a:lnB w="12700" cap="flat" cmpd="sng" algn="ctr">
+                      <a:solidFill>
+                        <a:schemeClr val="tx1"/>
+                      </a:solidFill>
+                      <a:prstDash val="solid"/>
+                      <a:round/>
+                      <a:headEnd type="none" w="med" len="med"/>
+                      <a:tailEnd type="none" w="med" len="med"/>
+                    </a:lnB>
+                    <a:noFill/>
+                  </a:tcPr>
+                </a:tc>
+                <a:tc>
+                  <a:txBody>
+                    <a:bodyPr/>
+                    <a:lstStyle/>
+                    <a:p>
+                      <a:pPr>
+                        <a:buNone/>
+                      </a:pPr>
+                      <a:r>
+                        <a:rPr lang="en-US" sz="1200">
+                          <a:latin typeface="Courier New" panose="02070309020205020404" pitchFamily="49" charset="0"/>
+                        </a:rPr>
+                        <a:t>dev-team</a:t>
+                      </a:r>
+                      <a:r>
+                        <a:rPr lang="en-US" sz="1200"/>
+                        <a:t>, </a:t>
+                      </a:r>
+                      <a:r>
+                        <a:rPr lang="en-US" sz="1200">
+                          <a:latin typeface="Courier New" panose="02070309020205020404" pitchFamily="49" charset="0"/>
+                        </a:rPr>
+                        <a:t>qa-team</a:t>
+                      </a:r>
+                      <a:endParaRPr lang="en-US" sz="1200"/>
+                    </a:p>
+                  </a:txBody>
+                  <a:tcPr marL="37641" marR="37641" marT="18820" marB="18820" anchor="ctr">
+                    <a:lnL w="12700" cap="flat" cmpd="sng" algn="ctr">
+                      <a:solidFill>
+                        <a:schemeClr val="tx1"/>
+                      </a:solidFill>
+                      <a:prstDash val="solid"/>
+                      <a:round/>
+                      <a:headEnd type="none" w="med" len="med"/>
+                      <a:tailEnd type="none" w="med" len="med"/>
+                    </a:lnL>
+                    <a:lnR w="12700" cap="flat" cmpd="sng" algn="ctr">
+                      <a:solidFill>
+                        <a:schemeClr val="tx1"/>
+                      </a:solidFill>
+                      <a:prstDash val="solid"/>
+                      <a:round/>
+                      <a:headEnd type="none" w="med" len="med"/>
+                      <a:tailEnd type="none" w="med" len="med"/>
+                    </a:lnR>
+                    <a:lnT w="12700" cap="flat" cmpd="sng" algn="ctr">
+                      <a:solidFill>
+                        <a:schemeClr val="tx1"/>
+                      </a:solidFill>
+                      <a:prstDash val="solid"/>
+                      <a:round/>
+                      <a:headEnd type="none" w="med" len="med"/>
+                      <a:tailEnd type="none" w="med" len="med"/>
+                    </a:lnT>
+                    <a:lnB w="12700" cap="flat" cmpd="sng" algn="ctr">
+                      <a:solidFill>
+                        <a:schemeClr val="tx1"/>
+                      </a:solidFill>
+                      <a:prstDash val="solid"/>
+                      <a:round/>
+                      <a:headEnd type="none" w="med" len="med"/>
+                      <a:tailEnd type="none" w="med" len="med"/>
+                    </a:lnB>
+                    <a:noFill/>
+                  </a:tcPr>
+                </a:tc>
+                <a:tc>
+                  <a:txBody>
+                    <a:bodyPr/>
+                    <a:lstStyle/>
+                    <a:p>
+                      <a:pPr>
+                        <a:buNone/>
+                      </a:pPr>
+                      <a:r>
+                        <a:rPr lang="en-US" sz="1200"/>
+                        <a:t>When many users need same permissions</a:t>
+                      </a:r>
+                    </a:p>
+                  </a:txBody>
+                  <a:tcPr marL="37641" marR="37641" marT="18820" marB="18820" anchor="ctr">
+                    <a:lnL w="12700" cap="flat" cmpd="sng" algn="ctr">
+                      <a:solidFill>
+                        <a:schemeClr val="tx1"/>
+                      </a:solidFill>
+                      <a:prstDash val="solid"/>
+                      <a:round/>
+                      <a:headEnd type="none" w="med" len="med"/>
+                      <a:tailEnd type="none" w="med" len="med"/>
+                    </a:lnL>
+                    <a:lnR w="12700" cap="flat" cmpd="sng" algn="ctr">
+                      <a:solidFill>
+                        <a:schemeClr val="tx1"/>
+                      </a:solidFill>
+                      <a:prstDash val="solid"/>
+                      <a:round/>
+                      <a:headEnd type="none" w="med" len="med"/>
+                      <a:tailEnd type="none" w="med" len="med"/>
+                    </a:lnR>
+                    <a:lnT w="12700" cap="flat" cmpd="sng" algn="ctr">
+                      <a:solidFill>
+                        <a:schemeClr val="tx1"/>
+                      </a:solidFill>
+                      <a:prstDash val="solid"/>
+                      <a:round/>
+                      <a:headEnd type="none" w="med" len="med"/>
+                      <a:tailEnd type="none" w="med" len="med"/>
+                    </a:lnT>
+                    <a:lnB w="12700" cap="flat" cmpd="sng" algn="ctr">
+                      <a:solidFill>
+                        <a:schemeClr val="tx1"/>
+                      </a:solidFill>
+                      <a:prstDash val="solid"/>
+                      <a:round/>
+                      <a:headEnd type="none" w="med" len="med"/>
+                      <a:tailEnd type="none" w="med" len="med"/>
+                    </a:lnB>
+                    <a:noFill/>
+                  </a:tcPr>
+                </a:tc>
+                <a:extLst>
+                  <a:ext uri="{0D108BD9-81ED-4DB2-BD59-A6C34878D82A}">
+                    <a16:rowId xmlns:a16="http://schemas.microsoft.com/office/drawing/2014/main" val="4042818798"/>
+                  </a:ext>
+                </a:extLst>
+              </a:tr>
+              <a:tr h="637221">
+                <a:tc>
+                  <a:txBody>
+                    <a:bodyPr/>
+                    <a:lstStyle/>
+                    <a:p>
+                      <a:pPr>
+                        <a:buNone/>
+                      </a:pPr>
+                      <a:r>
+                        <a:rPr lang="en-US" sz="1200" b="1"/>
+                        <a:t>ServiceAccount</a:t>
+                      </a:r>
+                      <a:endParaRPr lang="en-US" sz="1200"/>
+                    </a:p>
+                  </a:txBody>
+                  <a:tcPr marL="37641" marR="37641" marT="18820" marB="18820" anchor="ctr">
+                    <a:lnL w="12700" cap="flat" cmpd="sng" algn="ctr">
+                      <a:solidFill>
+                        <a:schemeClr val="tx1"/>
+                      </a:solidFill>
+                      <a:prstDash val="solid"/>
+                      <a:round/>
+                      <a:headEnd type="none" w="med" len="med"/>
+                      <a:tailEnd type="none" w="med" len="med"/>
+                    </a:lnL>
+                    <a:lnR w="12700" cap="flat" cmpd="sng" algn="ctr">
+                      <a:solidFill>
+                        <a:schemeClr val="tx1"/>
+                      </a:solidFill>
+                      <a:prstDash val="solid"/>
+                      <a:round/>
+                      <a:headEnd type="none" w="med" len="med"/>
+                      <a:tailEnd type="none" w="med" len="med"/>
+                    </a:lnR>
+                    <a:lnT w="12700" cap="flat" cmpd="sng" algn="ctr">
+                      <a:solidFill>
+                        <a:schemeClr val="tx1"/>
+                      </a:solidFill>
+                      <a:prstDash val="solid"/>
+                      <a:round/>
+                      <a:headEnd type="none" w="med" len="med"/>
+                      <a:tailEnd type="none" w="med" len="med"/>
+                    </a:lnT>
+                    <a:lnB w="12700" cap="flat" cmpd="sng" algn="ctr">
+                      <a:solidFill>
+                        <a:schemeClr val="tx1"/>
+                      </a:solidFill>
+                      <a:prstDash val="solid"/>
+                      <a:round/>
+                      <a:headEnd type="none" w="med" len="med"/>
+                      <a:tailEnd type="none" w="med" len="med"/>
+                    </a:lnB>
+                    <a:noFill/>
+                  </a:tcPr>
+                </a:tc>
+                <a:tc>
+                  <a:txBody>
+                    <a:bodyPr/>
+                    <a:lstStyle/>
+                    <a:p>
+                      <a:pPr>
+                        <a:buNone/>
+                      </a:pPr>
+                      <a:r>
+                        <a:rPr lang="en-US" sz="1200"/>
+                        <a:t>Identity for applications/pods</a:t>
+                      </a:r>
+                    </a:p>
+                  </a:txBody>
+                  <a:tcPr marL="37641" marR="37641" marT="18820" marB="18820" anchor="ctr">
+                    <a:lnL w="12700" cap="flat" cmpd="sng" algn="ctr">
+                      <a:solidFill>
+                        <a:schemeClr val="tx1"/>
+                      </a:solidFill>
+                      <a:prstDash val="solid"/>
+                      <a:round/>
+                      <a:headEnd type="none" w="med" len="med"/>
+                      <a:tailEnd type="none" w="med" len="med"/>
+                    </a:lnL>
+                    <a:lnR w="12700" cap="flat" cmpd="sng" algn="ctr">
+                      <a:solidFill>
+                        <a:schemeClr val="tx1"/>
+                      </a:solidFill>
+                      <a:prstDash val="solid"/>
+                      <a:round/>
+                      <a:headEnd type="none" w="med" len="med"/>
+                      <a:tailEnd type="none" w="med" len="med"/>
+                    </a:lnR>
+                    <a:lnT w="12700" cap="flat" cmpd="sng" algn="ctr">
+                      <a:solidFill>
+                        <a:schemeClr val="tx1"/>
+                      </a:solidFill>
+                      <a:prstDash val="solid"/>
+                      <a:round/>
+                      <a:headEnd type="none" w="med" len="med"/>
+                      <a:tailEnd type="none" w="med" len="med"/>
+                    </a:lnT>
+                    <a:lnB w="12700" cap="flat" cmpd="sng" algn="ctr">
+                      <a:solidFill>
+                        <a:schemeClr val="tx1"/>
+                      </a:solidFill>
+                      <a:prstDash val="solid"/>
+                      <a:round/>
+                      <a:headEnd type="none" w="med" len="med"/>
+                      <a:tailEnd type="none" w="med" len="med"/>
+                    </a:lnB>
+                    <a:noFill/>
+                  </a:tcPr>
+                </a:tc>
+                <a:tc>
+                  <a:txBody>
+                    <a:bodyPr/>
+                    <a:lstStyle/>
+                    <a:p>
+                      <a:pPr>
+                        <a:buNone/>
+                      </a:pPr>
+                      <a:r>
+                        <a:rPr lang="en-US" sz="1200"/>
+                        <a:t>Pod-to-cluster/API access</a:t>
+                      </a:r>
+                    </a:p>
+                  </a:txBody>
+                  <a:tcPr marL="37641" marR="37641" marT="18820" marB="18820" anchor="ctr">
+                    <a:lnL w="12700" cap="flat" cmpd="sng" algn="ctr">
+                      <a:solidFill>
+                        <a:schemeClr val="tx1"/>
+                      </a:solidFill>
+                      <a:prstDash val="solid"/>
+                      <a:round/>
+                      <a:headEnd type="none" w="med" len="med"/>
+                      <a:tailEnd type="none" w="med" len="med"/>
+                    </a:lnL>
+                    <a:lnR w="12700" cap="flat" cmpd="sng" algn="ctr">
+                      <a:solidFill>
+                        <a:schemeClr val="tx1"/>
+                      </a:solidFill>
+                      <a:prstDash val="solid"/>
+                      <a:round/>
+                      <a:headEnd type="none" w="med" len="med"/>
+                      <a:tailEnd type="none" w="med" len="med"/>
+                    </a:lnR>
+                    <a:lnT w="12700" cap="flat" cmpd="sng" algn="ctr">
+                      <a:solidFill>
+                        <a:schemeClr val="tx1"/>
+                      </a:solidFill>
+                      <a:prstDash val="solid"/>
+                      <a:round/>
+                      <a:headEnd type="none" w="med" len="med"/>
+                      <a:tailEnd type="none" w="med" len="med"/>
+                    </a:lnT>
+                    <a:lnB w="12700" cap="flat" cmpd="sng" algn="ctr">
+                      <a:solidFill>
+                        <a:schemeClr val="tx1"/>
+                      </a:solidFill>
+                      <a:prstDash val="solid"/>
+                      <a:round/>
+                      <a:headEnd type="none" w="med" len="med"/>
+                      <a:tailEnd type="none" w="med" len="med"/>
+                    </a:lnB>
+                    <a:noFill/>
+                  </a:tcPr>
+                </a:tc>
+                <a:tc>
+                  <a:txBody>
+                    <a:bodyPr/>
+                    <a:lstStyle/>
+                    <a:p>
+                      <a:pPr>
+                        <a:buNone/>
+                      </a:pPr>
+                      <a:r>
+                        <a:rPr lang="en-US" sz="1200"/>
+                        <a:t>Namespace (project)</a:t>
+                      </a:r>
+                    </a:p>
+                  </a:txBody>
+                  <a:tcPr marL="37641" marR="37641" marT="18820" marB="18820" anchor="ctr">
+                    <a:lnL w="12700" cap="flat" cmpd="sng" algn="ctr">
+                      <a:solidFill>
+                        <a:schemeClr val="tx1"/>
+                      </a:solidFill>
+                      <a:prstDash val="solid"/>
+                      <a:round/>
+                      <a:headEnd type="none" w="med" len="med"/>
+                      <a:tailEnd type="none" w="med" len="med"/>
+                    </a:lnL>
+                    <a:lnR w="12700" cap="flat" cmpd="sng" algn="ctr">
+                      <a:solidFill>
+                        <a:schemeClr val="tx1"/>
+                      </a:solidFill>
+                      <a:prstDash val="solid"/>
+                      <a:round/>
+                      <a:headEnd type="none" w="med" len="med"/>
+                      <a:tailEnd type="none" w="med" len="med"/>
+                    </a:lnR>
+                    <a:lnT w="12700" cap="flat" cmpd="sng" algn="ctr">
+                      <a:solidFill>
+                        <a:schemeClr val="tx1"/>
+                      </a:solidFill>
+                      <a:prstDash val="solid"/>
+                      <a:round/>
+                      <a:headEnd type="none" w="med" len="med"/>
+                      <a:tailEnd type="none" w="med" len="med"/>
+                    </a:lnT>
+                    <a:lnB w="12700" cap="flat" cmpd="sng" algn="ctr">
+                      <a:solidFill>
+                        <a:schemeClr val="tx1"/>
+                      </a:solidFill>
+                      <a:prstDash val="solid"/>
+                      <a:round/>
+                      <a:headEnd type="none" w="med" len="med"/>
+                      <a:tailEnd type="none" w="med" len="med"/>
+                    </a:lnB>
+                    <a:noFill/>
+                  </a:tcPr>
+                </a:tc>
+                <a:tc>
+                  <a:txBody>
+                    <a:bodyPr/>
+                    <a:lstStyle/>
+                    <a:p>
+                      <a:pPr>
+                        <a:buNone/>
+                      </a:pPr>
+                      <a:r>
+                        <a:rPr lang="en-US" sz="1200" dirty="0">
+                          <a:latin typeface="Courier New" panose="02070309020205020404" pitchFamily="49" charset="0"/>
+                        </a:rPr>
+                        <a:t>default</a:t>
+                      </a:r>
+                      <a:r>
+                        <a:rPr lang="en-US" sz="1200" dirty="0"/>
+                        <a:t>, </a:t>
+                      </a:r>
+                      <a:r>
+                        <a:rPr lang="en-US" sz="1200" dirty="0">
+                          <a:latin typeface="Courier New" panose="02070309020205020404" pitchFamily="49" charset="0"/>
+                        </a:rPr>
+                        <a:t>builder</a:t>
+                      </a:r>
+                      <a:endParaRPr lang="en-US" sz="1200" dirty="0"/>
+                    </a:p>
+                  </a:txBody>
+                  <a:tcPr marL="37641" marR="37641" marT="18820" marB="18820" anchor="ctr">
+                    <a:lnL w="12700" cap="flat" cmpd="sng" algn="ctr">
+                      <a:solidFill>
+                        <a:schemeClr val="tx1"/>
+                      </a:solidFill>
+                      <a:prstDash val="solid"/>
+                      <a:round/>
+                      <a:headEnd type="none" w="med" len="med"/>
+                      <a:tailEnd type="none" w="med" len="med"/>
+                    </a:lnL>
+                    <a:lnR w="12700" cap="flat" cmpd="sng" algn="ctr">
+                      <a:solidFill>
+                        <a:schemeClr val="tx1"/>
+                      </a:solidFill>
+                      <a:prstDash val="solid"/>
+                      <a:round/>
+                      <a:headEnd type="none" w="med" len="med"/>
+                      <a:tailEnd type="none" w="med" len="med"/>
+                    </a:lnR>
+                    <a:lnT w="12700" cap="flat" cmpd="sng" algn="ctr">
+                      <a:solidFill>
+                        <a:schemeClr val="tx1"/>
+                      </a:solidFill>
+                      <a:prstDash val="solid"/>
+                      <a:round/>
+                      <a:headEnd type="none" w="med" len="med"/>
+                      <a:tailEnd type="none" w="med" len="med"/>
+                    </a:lnT>
+                    <a:lnB w="12700" cap="flat" cmpd="sng" algn="ctr">
+                      <a:solidFill>
+                        <a:schemeClr val="tx1"/>
+                      </a:solidFill>
+                      <a:prstDash val="solid"/>
+                      <a:round/>
+                      <a:headEnd type="none" w="med" len="med"/>
+                      <a:tailEnd type="none" w="med" len="med"/>
+                    </a:lnB>
+                    <a:noFill/>
+                  </a:tcPr>
+                </a:tc>
+                <a:tc>
+                  <a:txBody>
+                    <a:bodyPr/>
+                    <a:lstStyle/>
+                    <a:p>
+                      <a:pPr>
+                        <a:buNone/>
+                      </a:pPr>
+                      <a:r>
+                        <a:rPr lang="en-US" sz="1200"/>
+                        <a:t>When apps need to call API or access resources</a:t>
+                      </a:r>
+                    </a:p>
+                  </a:txBody>
+                  <a:tcPr marL="37641" marR="37641" marT="18820" marB="18820" anchor="ctr">
+                    <a:lnL w="12700" cap="flat" cmpd="sng" algn="ctr">
+                      <a:solidFill>
+                        <a:schemeClr val="tx1"/>
+                      </a:solidFill>
+                      <a:prstDash val="solid"/>
+                      <a:round/>
+                      <a:headEnd type="none" w="med" len="med"/>
+                      <a:tailEnd type="none" w="med" len="med"/>
+                    </a:lnL>
+                    <a:lnR w="12700" cap="flat" cmpd="sng" algn="ctr">
+                      <a:solidFill>
+                        <a:schemeClr val="tx1"/>
+                      </a:solidFill>
+                      <a:prstDash val="solid"/>
+                      <a:round/>
+                      <a:headEnd type="none" w="med" len="med"/>
+                      <a:tailEnd type="none" w="med" len="med"/>
+                    </a:lnR>
+                    <a:lnT w="12700" cap="flat" cmpd="sng" algn="ctr">
+                      <a:solidFill>
+                        <a:schemeClr val="tx1"/>
+                      </a:solidFill>
+                      <a:prstDash val="solid"/>
+                      <a:round/>
+                      <a:headEnd type="none" w="med" len="med"/>
+                      <a:tailEnd type="none" w="med" len="med"/>
+                    </a:lnT>
+                    <a:lnB w="12700" cap="flat" cmpd="sng" algn="ctr">
+                      <a:solidFill>
+                        <a:schemeClr val="tx1"/>
+                      </a:solidFill>
+                      <a:prstDash val="solid"/>
+                      <a:round/>
+                      <a:headEnd type="none" w="med" len="med"/>
+                      <a:tailEnd type="none" w="med" len="med"/>
+                    </a:lnB>
+                    <a:noFill/>
+                  </a:tcPr>
+                </a:tc>
+                <a:extLst>
+                  <a:ext uri="{0D108BD9-81ED-4DB2-BD59-A6C34878D82A}">
+                    <a16:rowId xmlns:a16="http://schemas.microsoft.com/office/drawing/2014/main" val="3679570396"/>
+                  </a:ext>
+                </a:extLst>
+              </a:tr>
+              <a:tr h="490171">
+                <a:tc>
+                  <a:txBody>
+                    <a:bodyPr/>
+                    <a:lstStyle/>
+                    <a:p>
+                      <a:pPr>
+                        <a:buNone/>
+                      </a:pPr>
+                      <a:r>
+                        <a:rPr lang="en-US" sz="1200" b="1"/>
+                        <a:t>Role</a:t>
+                      </a:r>
+                      <a:endParaRPr lang="en-US" sz="1200"/>
+                    </a:p>
+                  </a:txBody>
+                  <a:tcPr marL="37641" marR="37641" marT="18820" marB="18820" anchor="ctr">
+                    <a:lnL w="12700" cap="flat" cmpd="sng" algn="ctr">
+                      <a:solidFill>
+                        <a:schemeClr val="tx1"/>
+                      </a:solidFill>
+                      <a:prstDash val="solid"/>
+                      <a:round/>
+                      <a:headEnd type="none" w="med" len="med"/>
+                      <a:tailEnd type="none" w="med" len="med"/>
+                    </a:lnL>
+                    <a:lnR w="12700" cap="flat" cmpd="sng" algn="ctr">
+                      <a:solidFill>
+                        <a:schemeClr val="tx1"/>
+                      </a:solidFill>
+                      <a:prstDash val="solid"/>
+                      <a:round/>
+                      <a:headEnd type="none" w="med" len="med"/>
+                      <a:tailEnd type="none" w="med" len="med"/>
+                    </a:lnR>
+                    <a:lnT w="12700" cap="flat" cmpd="sng" algn="ctr">
+                      <a:solidFill>
+                        <a:schemeClr val="tx1"/>
+                      </a:solidFill>
+                      <a:prstDash val="solid"/>
+                      <a:round/>
+                      <a:headEnd type="none" w="med" len="med"/>
+                      <a:tailEnd type="none" w="med" len="med"/>
+                    </a:lnT>
+                    <a:lnB w="12700" cap="flat" cmpd="sng" algn="ctr">
+                      <a:solidFill>
+                        <a:schemeClr val="tx1"/>
+                      </a:solidFill>
+                      <a:prstDash val="solid"/>
+                      <a:round/>
+                      <a:headEnd type="none" w="med" len="med"/>
+                      <a:tailEnd type="none" w="med" len="med"/>
+                    </a:lnB>
+                    <a:noFill/>
+                  </a:tcPr>
+                </a:tc>
+                <a:tc>
+                  <a:txBody>
+                    <a:bodyPr/>
+                    <a:lstStyle/>
+                    <a:p>
+                      <a:pPr>
+                        <a:buNone/>
+                      </a:pPr>
+                      <a:r>
+                        <a:rPr lang="en-US" sz="1200" dirty="0"/>
+                        <a:t>Set of permissions (rules)</a:t>
+                      </a:r>
+                    </a:p>
+                  </a:txBody>
+                  <a:tcPr marL="37641" marR="37641" marT="18820" marB="18820" anchor="ctr">
+                    <a:lnL w="12700" cap="flat" cmpd="sng" algn="ctr">
+                      <a:solidFill>
+                        <a:schemeClr val="tx1"/>
+                      </a:solidFill>
+                      <a:prstDash val="solid"/>
+                      <a:round/>
+                      <a:headEnd type="none" w="med" len="med"/>
+                      <a:tailEnd type="none" w="med" len="med"/>
+                    </a:lnL>
+                    <a:lnR w="12700" cap="flat" cmpd="sng" algn="ctr">
+                      <a:solidFill>
+                        <a:schemeClr val="tx1"/>
+                      </a:solidFill>
+                      <a:prstDash val="solid"/>
+                      <a:round/>
+                      <a:headEnd type="none" w="med" len="med"/>
+                      <a:tailEnd type="none" w="med" len="med"/>
+                    </a:lnR>
+                    <a:lnT w="12700" cap="flat" cmpd="sng" algn="ctr">
+                      <a:solidFill>
+                        <a:schemeClr val="tx1"/>
+                      </a:solidFill>
+                      <a:prstDash val="solid"/>
+                      <a:round/>
+                      <a:headEnd type="none" w="med" len="med"/>
+                      <a:tailEnd type="none" w="med" len="med"/>
+                    </a:lnT>
+                    <a:lnB w="12700" cap="flat" cmpd="sng" algn="ctr">
+                      <a:solidFill>
+                        <a:schemeClr val="tx1"/>
+                      </a:solidFill>
+                      <a:prstDash val="solid"/>
+                      <a:round/>
+                      <a:headEnd type="none" w="med" len="med"/>
+                      <a:tailEnd type="none" w="med" len="med"/>
+                    </a:lnB>
+                    <a:noFill/>
+                  </a:tcPr>
+                </a:tc>
+                <a:tc>
+                  <a:txBody>
+                    <a:bodyPr/>
+                    <a:lstStyle/>
+                    <a:p>
+                      <a:pPr>
+                        <a:buNone/>
+                      </a:pPr>
+                      <a:r>
+                        <a:rPr lang="en-US" sz="1200"/>
+                        <a:t>Define what actions are allowed</a:t>
+                      </a:r>
+                    </a:p>
+                  </a:txBody>
+                  <a:tcPr marL="37641" marR="37641" marT="18820" marB="18820" anchor="ctr">
+                    <a:lnL w="12700" cap="flat" cmpd="sng" algn="ctr">
+                      <a:solidFill>
+                        <a:schemeClr val="tx1"/>
+                      </a:solidFill>
+                      <a:prstDash val="solid"/>
+                      <a:round/>
+                      <a:headEnd type="none" w="med" len="med"/>
+                      <a:tailEnd type="none" w="med" len="med"/>
+                    </a:lnL>
+                    <a:lnR w="12700" cap="flat" cmpd="sng" algn="ctr">
+                      <a:solidFill>
+                        <a:schemeClr val="tx1"/>
+                      </a:solidFill>
+                      <a:prstDash val="solid"/>
+                      <a:round/>
+                      <a:headEnd type="none" w="med" len="med"/>
+                      <a:tailEnd type="none" w="med" len="med"/>
+                    </a:lnR>
+                    <a:lnT w="12700" cap="flat" cmpd="sng" algn="ctr">
+                      <a:solidFill>
+                        <a:schemeClr val="tx1"/>
+                      </a:solidFill>
+                      <a:prstDash val="solid"/>
+                      <a:round/>
+                      <a:headEnd type="none" w="med" len="med"/>
+                      <a:tailEnd type="none" w="med" len="med"/>
+                    </a:lnT>
+                    <a:lnB w="12700" cap="flat" cmpd="sng" algn="ctr">
+                      <a:solidFill>
+                        <a:schemeClr val="tx1"/>
+                      </a:solidFill>
+                      <a:prstDash val="solid"/>
+                      <a:round/>
+                      <a:headEnd type="none" w="med" len="med"/>
+                      <a:tailEnd type="none" w="med" len="med"/>
+                    </a:lnB>
+                    <a:noFill/>
+                  </a:tcPr>
+                </a:tc>
+                <a:tc>
+                  <a:txBody>
+                    <a:bodyPr/>
+                    <a:lstStyle/>
+                    <a:p>
+                      <a:pPr>
+                        <a:buNone/>
+                      </a:pPr>
+                      <a:r>
+                        <a:rPr lang="en-US" sz="1200"/>
+                        <a:t>Namespace</a:t>
+                      </a:r>
+                    </a:p>
+                  </a:txBody>
+                  <a:tcPr marL="37641" marR="37641" marT="18820" marB="18820" anchor="ctr">
+                    <a:lnL w="12700" cap="flat" cmpd="sng" algn="ctr">
+                      <a:solidFill>
+                        <a:schemeClr val="tx1"/>
+                      </a:solidFill>
+                      <a:prstDash val="solid"/>
+                      <a:round/>
+                      <a:headEnd type="none" w="med" len="med"/>
+                      <a:tailEnd type="none" w="med" len="med"/>
+                    </a:lnL>
+                    <a:lnR w="12700" cap="flat" cmpd="sng" algn="ctr">
+                      <a:solidFill>
+                        <a:schemeClr val="tx1"/>
+                      </a:solidFill>
+                      <a:prstDash val="solid"/>
+                      <a:round/>
+                      <a:headEnd type="none" w="med" len="med"/>
+                      <a:tailEnd type="none" w="med" len="med"/>
+                    </a:lnR>
+                    <a:lnT w="12700" cap="flat" cmpd="sng" algn="ctr">
+                      <a:solidFill>
+                        <a:schemeClr val="tx1"/>
+                      </a:solidFill>
+                      <a:prstDash val="solid"/>
+                      <a:round/>
+                      <a:headEnd type="none" w="med" len="med"/>
+                      <a:tailEnd type="none" w="med" len="med"/>
+                    </a:lnT>
+                    <a:lnB w="12700" cap="flat" cmpd="sng" algn="ctr">
+                      <a:solidFill>
+                        <a:schemeClr val="tx1"/>
+                      </a:solidFill>
+                      <a:prstDash val="solid"/>
+                      <a:round/>
+                      <a:headEnd type="none" w="med" len="med"/>
+                      <a:tailEnd type="none" w="med" len="med"/>
+                    </a:lnB>
+                    <a:noFill/>
+                  </a:tcPr>
+                </a:tc>
+                <a:tc>
+                  <a:txBody>
+                    <a:bodyPr/>
+                    <a:lstStyle/>
+                    <a:p>
+                      <a:pPr>
+                        <a:buNone/>
+                      </a:pPr>
+                      <a:r>
+                        <a:rPr lang="en-US" sz="1200" dirty="0">
+                          <a:latin typeface="Courier New" panose="02070309020205020404" pitchFamily="49" charset="0"/>
+                        </a:rPr>
+                        <a:t>edit</a:t>
+                      </a:r>
+                      <a:r>
+                        <a:rPr lang="en-US" sz="1200" dirty="0"/>
+                        <a:t>, custom role</a:t>
+                      </a:r>
+                    </a:p>
+                  </a:txBody>
+                  <a:tcPr marL="37641" marR="37641" marT="18820" marB="18820" anchor="ctr">
+                    <a:lnL w="12700" cap="flat" cmpd="sng" algn="ctr">
+                      <a:solidFill>
+                        <a:schemeClr val="tx1"/>
+                      </a:solidFill>
+                      <a:prstDash val="solid"/>
+                      <a:round/>
+                      <a:headEnd type="none" w="med" len="med"/>
+                      <a:tailEnd type="none" w="med" len="med"/>
+                    </a:lnL>
+                    <a:lnR w="12700" cap="flat" cmpd="sng" algn="ctr">
+                      <a:solidFill>
+                        <a:schemeClr val="tx1"/>
+                      </a:solidFill>
+                      <a:prstDash val="solid"/>
+                      <a:round/>
+                      <a:headEnd type="none" w="med" len="med"/>
+                      <a:tailEnd type="none" w="med" len="med"/>
+                    </a:lnR>
+                    <a:lnT w="12700" cap="flat" cmpd="sng" algn="ctr">
+                      <a:solidFill>
+                        <a:schemeClr val="tx1"/>
+                      </a:solidFill>
+                      <a:prstDash val="solid"/>
+                      <a:round/>
+                      <a:headEnd type="none" w="med" len="med"/>
+                      <a:tailEnd type="none" w="med" len="med"/>
+                    </a:lnT>
+                    <a:lnB w="12700" cap="flat" cmpd="sng" algn="ctr">
+                      <a:solidFill>
+                        <a:schemeClr val="tx1"/>
+                      </a:solidFill>
+                      <a:prstDash val="solid"/>
+                      <a:round/>
+                      <a:headEnd type="none" w="med" len="med"/>
+                      <a:tailEnd type="none" w="med" len="med"/>
+                    </a:lnB>
+                    <a:noFill/>
+                  </a:tcPr>
+                </a:tc>
+                <a:tc>
+                  <a:txBody>
+                    <a:bodyPr/>
+                    <a:lstStyle/>
+                    <a:p>
+                      <a:pPr>
+                        <a:buNone/>
+                      </a:pPr>
+                      <a:r>
+                        <a:rPr lang="en-US" sz="1200"/>
+                        <a:t>When defining access inside a project</a:t>
+                      </a:r>
+                    </a:p>
+                  </a:txBody>
+                  <a:tcPr marL="37641" marR="37641" marT="18820" marB="18820" anchor="ctr">
+                    <a:lnL w="12700" cap="flat" cmpd="sng" algn="ctr">
+                      <a:solidFill>
+                        <a:schemeClr val="tx1"/>
+                      </a:solidFill>
+                      <a:prstDash val="solid"/>
+                      <a:round/>
+                      <a:headEnd type="none" w="med" len="med"/>
+                      <a:tailEnd type="none" w="med" len="med"/>
+                    </a:lnL>
+                    <a:lnR w="12700" cap="flat" cmpd="sng" algn="ctr">
+                      <a:solidFill>
+                        <a:schemeClr val="tx1"/>
+                      </a:solidFill>
+                      <a:prstDash val="solid"/>
+                      <a:round/>
+                      <a:headEnd type="none" w="med" len="med"/>
+                      <a:tailEnd type="none" w="med" len="med"/>
+                    </a:lnR>
+                    <a:lnT w="12700" cap="flat" cmpd="sng" algn="ctr">
+                      <a:solidFill>
+                        <a:schemeClr val="tx1"/>
+                      </a:solidFill>
+                      <a:prstDash val="solid"/>
+                      <a:round/>
+                      <a:headEnd type="none" w="med" len="med"/>
+                      <a:tailEnd type="none" w="med" len="med"/>
+                    </a:lnT>
+                    <a:lnB w="12700" cap="flat" cmpd="sng" algn="ctr">
+                      <a:solidFill>
+                        <a:schemeClr val="tx1"/>
+                      </a:solidFill>
+                      <a:prstDash val="solid"/>
+                      <a:round/>
+                      <a:headEnd type="none" w="med" len="med"/>
+                      <a:tailEnd type="none" w="med" len="med"/>
+                    </a:lnB>
+                    <a:noFill/>
+                  </a:tcPr>
+                </a:tc>
+                <a:extLst>
+                  <a:ext uri="{0D108BD9-81ED-4DB2-BD59-A6C34878D82A}">
+                    <a16:rowId xmlns:a16="http://schemas.microsoft.com/office/drawing/2014/main" val="3476438205"/>
+                  </a:ext>
+                </a:extLst>
+              </a:tr>
+              <a:tr h="490171">
+                <a:tc>
+                  <a:txBody>
+                    <a:bodyPr/>
+                    <a:lstStyle/>
+                    <a:p>
+                      <a:pPr>
+                        <a:buNone/>
+                      </a:pPr>
+                      <a:r>
+                        <a:rPr lang="en-US" sz="1200" b="1"/>
+                        <a:t>ClusterRole</a:t>
+                      </a:r>
+                      <a:endParaRPr lang="en-US" sz="1200"/>
+                    </a:p>
+                  </a:txBody>
+                  <a:tcPr marL="37641" marR="37641" marT="18820" marB="18820" anchor="ctr">
+                    <a:lnL w="12700" cap="flat" cmpd="sng" algn="ctr">
+                      <a:solidFill>
+                        <a:schemeClr val="tx1"/>
+                      </a:solidFill>
+                      <a:prstDash val="solid"/>
+                      <a:round/>
+                      <a:headEnd type="none" w="med" len="med"/>
+                      <a:tailEnd type="none" w="med" len="med"/>
+                    </a:lnL>
+                    <a:lnR w="12700" cap="flat" cmpd="sng" algn="ctr">
+                      <a:solidFill>
+                        <a:schemeClr val="tx1"/>
+                      </a:solidFill>
+                      <a:prstDash val="solid"/>
+                      <a:round/>
+                      <a:headEnd type="none" w="med" len="med"/>
+                      <a:tailEnd type="none" w="med" len="med"/>
+                    </a:lnR>
+                    <a:lnT w="12700" cap="flat" cmpd="sng" algn="ctr">
+                      <a:solidFill>
+                        <a:schemeClr val="tx1"/>
+                      </a:solidFill>
+                      <a:prstDash val="solid"/>
+                      <a:round/>
+                      <a:headEnd type="none" w="med" len="med"/>
+                      <a:tailEnd type="none" w="med" len="med"/>
+                    </a:lnT>
+                    <a:lnB w="12700" cap="flat" cmpd="sng" algn="ctr">
+                      <a:solidFill>
+                        <a:schemeClr val="tx1"/>
+                      </a:solidFill>
+                      <a:prstDash val="solid"/>
+                      <a:round/>
+                      <a:headEnd type="none" w="med" len="med"/>
+                      <a:tailEnd type="none" w="med" len="med"/>
+                    </a:lnB>
+                    <a:noFill/>
+                  </a:tcPr>
+                </a:tc>
+                <a:tc>
+                  <a:txBody>
+                    <a:bodyPr/>
+                    <a:lstStyle/>
+                    <a:p>
+                      <a:pPr>
+                        <a:buNone/>
+                      </a:pPr>
+                      <a:r>
+                        <a:rPr lang="en-US" sz="1200"/>
+                        <a:t>Permissions at cluster level</a:t>
+                      </a:r>
+                    </a:p>
+                  </a:txBody>
+                  <a:tcPr marL="37641" marR="37641" marT="18820" marB="18820" anchor="ctr">
+                    <a:lnL w="12700" cap="flat" cmpd="sng" algn="ctr">
+                      <a:solidFill>
+                        <a:schemeClr val="tx1"/>
+                      </a:solidFill>
+                      <a:prstDash val="solid"/>
+                      <a:round/>
+                      <a:headEnd type="none" w="med" len="med"/>
+                      <a:tailEnd type="none" w="med" len="med"/>
+                    </a:lnL>
+                    <a:lnR w="12700" cap="flat" cmpd="sng" algn="ctr">
+                      <a:solidFill>
+                        <a:schemeClr val="tx1"/>
+                      </a:solidFill>
+                      <a:prstDash val="solid"/>
+                      <a:round/>
+                      <a:headEnd type="none" w="med" len="med"/>
+                      <a:tailEnd type="none" w="med" len="med"/>
+                    </a:lnR>
+                    <a:lnT w="12700" cap="flat" cmpd="sng" algn="ctr">
+                      <a:solidFill>
+                        <a:schemeClr val="tx1"/>
+                      </a:solidFill>
+                      <a:prstDash val="solid"/>
+                      <a:round/>
+                      <a:headEnd type="none" w="med" len="med"/>
+                      <a:tailEnd type="none" w="med" len="med"/>
+                    </a:lnT>
+                    <a:lnB w="12700" cap="flat" cmpd="sng" algn="ctr">
+                      <a:solidFill>
+                        <a:schemeClr val="tx1"/>
+                      </a:solidFill>
+                      <a:prstDash val="solid"/>
+                      <a:round/>
+                      <a:headEnd type="none" w="med" len="med"/>
+                      <a:tailEnd type="none" w="med" len="med"/>
+                    </a:lnB>
+                    <a:noFill/>
+                  </a:tcPr>
+                </a:tc>
+                <a:tc>
+                  <a:txBody>
+                    <a:bodyPr/>
+                    <a:lstStyle/>
+                    <a:p>
+                      <a:pPr>
+                        <a:buNone/>
+                      </a:pPr>
+                      <a:r>
+                        <a:rPr lang="en-US" sz="1200"/>
+                        <a:t>Define cluster-wide access</a:t>
+                      </a:r>
+                    </a:p>
+                  </a:txBody>
+                  <a:tcPr marL="37641" marR="37641" marT="18820" marB="18820" anchor="ctr">
+                    <a:lnL w="12700" cap="flat" cmpd="sng" algn="ctr">
+                      <a:solidFill>
+                        <a:schemeClr val="tx1"/>
+                      </a:solidFill>
+                      <a:prstDash val="solid"/>
+                      <a:round/>
+                      <a:headEnd type="none" w="med" len="med"/>
+                      <a:tailEnd type="none" w="med" len="med"/>
+                    </a:lnL>
+                    <a:lnR w="12700" cap="flat" cmpd="sng" algn="ctr">
+                      <a:solidFill>
+                        <a:schemeClr val="tx1"/>
+                      </a:solidFill>
+                      <a:prstDash val="solid"/>
+                      <a:round/>
+                      <a:headEnd type="none" w="med" len="med"/>
+                      <a:tailEnd type="none" w="med" len="med"/>
+                    </a:lnR>
+                    <a:lnT w="12700" cap="flat" cmpd="sng" algn="ctr">
+                      <a:solidFill>
+                        <a:schemeClr val="tx1"/>
+                      </a:solidFill>
+                      <a:prstDash val="solid"/>
+                      <a:round/>
+                      <a:headEnd type="none" w="med" len="med"/>
+                      <a:tailEnd type="none" w="med" len="med"/>
+                    </a:lnT>
+                    <a:lnB w="12700" cap="flat" cmpd="sng" algn="ctr">
+                      <a:solidFill>
+                        <a:schemeClr val="tx1"/>
+                      </a:solidFill>
+                      <a:prstDash val="solid"/>
+                      <a:round/>
+                      <a:headEnd type="none" w="med" len="med"/>
+                      <a:tailEnd type="none" w="med" len="med"/>
+                    </a:lnB>
+                    <a:noFill/>
+                  </a:tcPr>
+                </a:tc>
+                <a:tc>
+                  <a:txBody>
+                    <a:bodyPr/>
+                    <a:lstStyle/>
+                    <a:p>
+                      <a:pPr>
+                        <a:buNone/>
+                      </a:pPr>
+                      <a:r>
+                        <a:rPr lang="en-US" sz="1200"/>
+                        <a:t>Cluster</a:t>
+                      </a:r>
+                    </a:p>
+                  </a:txBody>
+                  <a:tcPr marL="37641" marR="37641" marT="18820" marB="18820" anchor="ctr">
+                    <a:lnL w="12700" cap="flat" cmpd="sng" algn="ctr">
+                      <a:solidFill>
+                        <a:schemeClr val="tx1"/>
+                      </a:solidFill>
+                      <a:prstDash val="solid"/>
+                      <a:round/>
+                      <a:headEnd type="none" w="med" len="med"/>
+                      <a:tailEnd type="none" w="med" len="med"/>
+                    </a:lnL>
+                    <a:lnR w="12700" cap="flat" cmpd="sng" algn="ctr">
+                      <a:solidFill>
+                        <a:schemeClr val="tx1"/>
+                      </a:solidFill>
+                      <a:prstDash val="solid"/>
+                      <a:round/>
+                      <a:headEnd type="none" w="med" len="med"/>
+                      <a:tailEnd type="none" w="med" len="med"/>
+                    </a:lnR>
+                    <a:lnT w="12700" cap="flat" cmpd="sng" algn="ctr">
+                      <a:solidFill>
+                        <a:schemeClr val="tx1"/>
+                      </a:solidFill>
+                      <a:prstDash val="solid"/>
+                      <a:round/>
+                      <a:headEnd type="none" w="med" len="med"/>
+                      <a:tailEnd type="none" w="med" len="med"/>
+                    </a:lnT>
+                    <a:lnB w="12700" cap="flat" cmpd="sng" algn="ctr">
+                      <a:solidFill>
+                        <a:schemeClr val="tx1"/>
+                      </a:solidFill>
+                      <a:prstDash val="solid"/>
+                      <a:round/>
+                      <a:headEnd type="none" w="med" len="med"/>
+                      <a:tailEnd type="none" w="med" len="med"/>
+                    </a:lnB>
+                    <a:noFill/>
+                  </a:tcPr>
+                </a:tc>
+                <a:tc>
+                  <a:txBody>
+                    <a:bodyPr/>
+                    <a:lstStyle/>
+                    <a:p>
+                      <a:pPr>
+                        <a:buNone/>
+                      </a:pPr>
+                      <a:r>
+                        <a:rPr lang="en-US" sz="1200">
+                          <a:latin typeface="Courier New" panose="02070309020205020404" pitchFamily="49" charset="0"/>
+                        </a:rPr>
+                        <a:t>cluster-admin</a:t>
+                      </a:r>
+                      <a:r>
+                        <a:rPr lang="en-US" sz="1200"/>
+                        <a:t>, </a:t>
+                      </a:r>
+                      <a:r>
+                        <a:rPr lang="en-US" sz="1200">
+                          <a:latin typeface="Courier New" panose="02070309020205020404" pitchFamily="49" charset="0"/>
+                        </a:rPr>
+                        <a:t>view</a:t>
+                      </a:r>
+                      <a:endParaRPr lang="en-US" sz="1200"/>
+                    </a:p>
+                  </a:txBody>
+                  <a:tcPr marL="37641" marR="37641" marT="18820" marB="18820" anchor="ctr">
+                    <a:lnL w="12700" cap="flat" cmpd="sng" algn="ctr">
+                      <a:solidFill>
+                        <a:schemeClr val="tx1"/>
+                      </a:solidFill>
+                      <a:prstDash val="solid"/>
+                      <a:round/>
+                      <a:headEnd type="none" w="med" len="med"/>
+                      <a:tailEnd type="none" w="med" len="med"/>
+                    </a:lnL>
+                    <a:lnR w="12700" cap="flat" cmpd="sng" algn="ctr">
+                      <a:solidFill>
+                        <a:schemeClr val="tx1"/>
+                      </a:solidFill>
+                      <a:prstDash val="solid"/>
+                      <a:round/>
+                      <a:headEnd type="none" w="med" len="med"/>
+                      <a:tailEnd type="none" w="med" len="med"/>
+                    </a:lnR>
+                    <a:lnT w="12700" cap="flat" cmpd="sng" algn="ctr">
+                      <a:solidFill>
+                        <a:schemeClr val="tx1"/>
+                      </a:solidFill>
+                      <a:prstDash val="solid"/>
+                      <a:round/>
+                      <a:headEnd type="none" w="med" len="med"/>
+                      <a:tailEnd type="none" w="med" len="med"/>
+                    </a:lnT>
+                    <a:lnB w="12700" cap="flat" cmpd="sng" algn="ctr">
+                      <a:solidFill>
+                        <a:schemeClr val="tx1"/>
+                      </a:solidFill>
+                      <a:prstDash val="solid"/>
+                      <a:round/>
+                      <a:headEnd type="none" w="med" len="med"/>
+                      <a:tailEnd type="none" w="med" len="med"/>
+                    </a:lnB>
+                    <a:noFill/>
+                  </a:tcPr>
+                </a:tc>
+                <a:tc>
+                  <a:txBody>
+                    <a:bodyPr/>
+                    <a:lstStyle/>
+                    <a:p>
+                      <a:pPr>
+                        <a:buNone/>
+                      </a:pPr>
+                      <a:r>
+                        <a:rPr lang="en-US" sz="1200"/>
+                        <a:t>When access spans across projects/nodes</a:t>
+                      </a:r>
+                    </a:p>
+                  </a:txBody>
+                  <a:tcPr marL="37641" marR="37641" marT="18820" marB="18820" anchor="ctr">
+                    <a:lnL w="12700" cap="flat" cmpd="sng" algn="ctr">
+                      <a:solidFill>
+                        <a:schemeClr val="tx1"/>
+                      </a:solidFill>
+                      <a:prstDash val="solid"/>
+                      <a:round/>
+                      <a:headEnd type="none" w="med" len="med"/>
+                      <a:tailEnd type="none" w="med" len="med"/>
+                    </a:lnL>
+                    <a:lnR w="12700" cap="flat" cmpd="sng" algn="ctr">
+                      <a:solidFill>
+                        <a:schemeClr val="tx1"/>
+                      </a:solidFill>
+                      <a:prstDash val="solid"/>
+                      <a:round/>
+                      <a:headEnd type="none" w="med" len="med"/>
+                      <a:tailEnd type="none" w="med" len="med"/>
+                    </a:lnR>
+                    <a:lnT w="12700" cap="flat" cmpd="sng" algn="ctr">
+                      <a:solidFill>
+                        <a:schemeClr val="tx1"/>
+                      </a:solidFill>
+                      <a:prstDash val="solid"/>
+                      <a:round/>
+                      <a:headEnd type="none" w="med" len="med"/>
+                      <a:tailEnd type="none" w="med" len="med"/>
+                    </a:lnT>
+                    <a:lnB w="12700" cap="flat" cmpd="sng" algn="ctr">
+                      <a:solidFill>
+                        <a:schemeClr val="tx1"/>
+                      </a:solidFill>
+                      <a:prstDash val="solid"/>
+                      <a:round/>
+                      <a:headEnd type="none" w="med" len="med"/>
+                      <a:tailEnd type="none" w="med" len="med"/>
+                    </a:lnB>
+                    <a:noFill/>
+                  </a:tcPr>
+                </a:tc>
+                <a:extLst>
+                  <a:ext uri="{0D108BD9-81ED-4DB2-BD59-A6C34878D82A}">
+                    <a16:rowId xmlns:a16="http://schemas.microsoft.com/office/drawing/2014/main" val="3010950347"/>
+                  </a:ext>
+                </a:extLst>
+              </a:tr>
+              <a:tr h="490171">
+                <a:tc>
+                  <a:txBody>
+                    <a:bodyPr/>
+                    <a:lstStyle/>
+                    <a:p>
+                      <a:pPr>
+                        <a:buNone/>
+                      </a:pPr>
+                      <a:r>
+                        <a:rPr lang="en-US" sz="1200" b="1"/>
+                        <a:t>RoleBinding</a:t>
+                      </a:r>
+                      <a:endParaRPr lang="en-US" sz="1200"/>
+                    </a:p>
+                  </a:txBody>
+                  <a:tcPr marL="37641" marR="37641" marT="18820" marB="18820" anchor="ctr">
+                    <a:lnL w="12700" cap="flat" cmpd="sng" algn="ctr">
+                      <a:solidFill>
+                        <a:schemeClr val="tx1"/>
+                      </a:solidFill>
+                      <a:prstDash val="solid"/>
+                      <a:round/>
+                      <a:headEnd type="none" w="med" len="med"/>
+                      <a:tailEnd type="none" w="med" len="med"/>
+                    </a:lnL>
+                    <a:lnR w="12700" cap="flat" cmpd="sng" algn="ctr">
+                      <a:solidFill>
+                        <a:schemeClr val="tx1"/>
+                      </a:solidFill>
+                      <a:prstDash val="solid"/>
+                      <a:round/>
+                      <a:headEnd type="none" w="med" len="med"/>
+                      <a:tailEnd type="none" w="med" len="med"/>
+                    </a:lnR>
+                    <a:lnT w="12700" cap="flat" cmpd="sng" algn="ctr">
+                      <a:solidFill>
+                        <a:schemeClr val="tx1"/>
+                      </a:solidFill>
+                      <a:prstDash val="solid"/>
+                      <a:round/>
+                      <a:headEnd type="none" w="med" len="med"/>
+                      <a:tailEnd type="none" w="med" len="med"/>
+                    </a:lnT>
+                    <a:lnB w="12700" cap="flat" cmpd="sng" algn="ctr">
+                      <a:solidFill>
+                        <a:schemeClr val="tx1"/>
+                      </a:solidFill>
+                      <a:prstDash val="solid"/>
+                      <a:round/>
+                      <a:headEnd type="none" w="med" len="med"/>
+                      <a:tailEnd type="none" w="med" len="med"/>
+                    </a:lnB>
+                    <a:noFill/>
+                  </a:tcPr>
+                </a:tc>
+                <a:tc>
+                  <a:txBody>
+                    <a:bodyPr/>
+                    <a:lstStyle/>
+                    <a:p>
+                      <a:pPr>
+                        <a:buNone/>
+                      </a:pPr>
+                      <a:r>
+                        <a:rPr lang="en-US" sz="1200"/>
+                        <a:t>Connects Role → User/Group/SA</a:t>
+                      </a:r>
+                    </a:p>
+                  </a:txBody>
+                  <a:tcPr marL="37641" marR="37641" marT="18820" marB="18820" anchor="ctr">
+                    <a:lnL w="12700" cap="flat" cmpd="sng" algn="ctr">
+                      <a:solidFill>
+                        <a:schemeClr val="tx1"/>
+                      </a:solidFill>
+                      <a:prstDash val="solid"/>
+                      <a:round/>
+                      <a:headEnd type="none" w="med" len="med"/>
+                      <a:tailEnd type="none" w="med" len="med"/>
+                    </a:lnL>
+                    <a:lnR w="12700" cap="flat" cmpd="sng" algn="ctr">
+                      <a:solidFill>
+                        <a:schemeClr val="tx1"/>
+                      </a:solidFill>
+                      <a:prstDash val="solid"/>
+                      <a:round/>
+                      <a:headEnd type="none" w="med" len="med"/>
+                      <a:tailEnd type="none" w="med" len="med"/>
+                    </a:lnR>
+                    <a:lnT w="12700" cap="flat" cmpd="sng" algn="ctr">
+                      <a:solidFill>
+                        <a:schemeClr val="tx1"/>
+                      </a:solidFill>
+                      <a:prstDash val="solid"/>
+                      <a:round/>
+                      <a:headEnd type="none" w="med" len="med"/>
+                      <a:tailEnd type="none" w="med" len="med"/>
+                    </a:lnT>
+                    <a:lnB w="12700" cap="flat" cmpd="sng" algn="ctr">
+                      <a:solidFill>
+                        <a:schemeClr val="tx1"/>
+                      </a:solidFill>
+                      <a:prstDash val="solid"/>
+                      <a:round/>
+                      <a:headEnd type="none" w="med" len="med"/>
+                      <a:tailEnd type="none" w="med" len="med"/>
+                    </a:lnB>
+                    <a:noFill/>
+                  </a:tcPr>
+                </a:tc>
+                <a:tc>
+                  <a:txBody>
+                    <a:bodyPr/>
+                    <a:lstStyle/>
+                    <a:p>
+                      <a:pPr>
+                        <a:buNone/>
+                      </a:pPr>
+                      <a:r>
+                        <a:rPr lang="en-US" sz="1200"/>
+                        <a:t>Grants access inside project</a:t>
+                      </a:r>
+                    </a:p>
+                  </a:txBody>
+                  <a:tcPr marL="37641" marR="37641" marT="18820" marB="18820" anchor="ctr">
+                    <a:lnL w="12700" cap="flat" cmpd="sng" algn="ctr">
+                      <a:solidFill>
+                        <a:schemeClr val="tx1"/>
+                      </a:solidFill>
+                      <a:prstDash val="solid"/>
+                      <a:round/>
+                      <a:headEnd type="none" w="med" len="med"/>
+                      <a:tailEnd type="none" w="med" len="med"/>
+                    </a:lnL>
+                    <a:lnR w="12700" cap="flat" cmpd="sng" algn="ctr">
+                      <a:solidFill>
+                        <a:schemeClr val="tx1"/>
+                      </a:solidFill>
+                      <a:prstDash val="solid"/>
+                      <a:round/>
+                      <a:headEnd type="none" w="med" len="med"/>
+                      <a:tailEnd type="none" w="med" len="med"/>
+                    </a:lnR>
+                    <a:lnT w="12700" cap="flat" cmpd="sng" algn="ctr">
+                      <a:solidFill>
+                        <a:schemeClr val="tx1"/>
+                      </a:solidFill>
+                      <a:prstDash val="solid"/>
+                      <a:round/>
+                      <a:headEnd type="none" w="med" len="med"/>
+                      <a:tailEnd type="none" w="med" len="med"/>
+                    </a:lnT>
+                    <a:lnB w="12700" cap="flat" cmpd="sng" algn="ctr">
+                      <a:solidFill>
+                        <a:schemeClr val="tx1"/>
+                      </a:solidFill>
+                      <a:prstDash val="solid"/>
+                      <a:round/>
+                      <a:headEnd type="none" w="med" len="med"/>
+                      <a:tailEnd type="none" w="med" len="med"/>
+                    </a:lnB>
+                    <a:noFill/>
+                  </a:tcPr>
+                </a:tc>
+                <a:tc>
+                  <a:txBody>
+                    <a:bodyPr/>
+                    <a:lstStyle/>
+                    <a:p>
+                      <a:pPr>
+                        <a:buNone/>
+                      </a:pPr>
+                      <a:r>
+                        <a:rPr lang="en-US" sz="1200"/>
+                        <a:t>Namespace</a:t>
+                      </a:r>
+                    </a:p>
+                  </a:txBody>
+                  <a:tcPr marL="37641" marR="37641" marT="18820" marB="18820" anchor="ctr">
+                    <a:lnL w="12700" cap="flat" cmpd="sng" algn="ctr">
+                      <a:solidFill>
+                        <a:schemeClr val="tx1"/>
+                      </a:solidFill>
+                      <a:prstDash val="solid"/>
+                      <a:round/>
+                      <a:headEnd type="none" w="med" len="med"/>
+                      <a:tailEnd type="none" w="med" len="med"/>
+                    </a:lnL>
+                    <a:lnR w="12700" cap="flat" cmpd="sng" algn="ctr">
+                      <a:solidFill>
+                        <a:schemeClr val="tx1"/>
+                      </a:solidFill>
+                      <a:prstDash val="solid"/>
+                      <a:round/>
+                      <a:headEnd type="none" w="med" len="med"/>
+                      <a:tailEnd type="none" w="med" len="med"/>
+                    </a:lnR>
+                    <a:lnT w="12700" cap="flat" cmpd="sng" algn="ctr">
+                      <a:solidFill>
+                        <a:schemeClr val="tx1"/>
+                      </a:solidFill>
+                      <a:prstDash val="solid"/>
+                      <a:round/>
+                      <a:headEnd type="none" w="med" len="med"/>
+                      <a:tailEnd type="none" w="med" len="med"/>
+                    </a:lnT>
+                    <a:lnB w="12700" cap="flat" cmpd="sng" algn="ctr">
+                      <a:solidFill>
+                        <a:schemeClr val="tx1"/>
+                      </a:solidFill>
+                      <a:prstDash val="solid"/>
+                      <a:round/>
+                      <a:headEnd type="none" w="med" len="med"/>
+                      <a:tailEnd type="none" w="med" len="med"/>
+                    </a:lnB>
+                    <a:noFill/>
+                  </a:tcPr>
+                </a:tc>
+                <a:tc>
+                  <a:txBody>
+                    <a:bodyPr/>
+                    <a:lstStyle/>
+                    <a:p>
+                      <a:pPr>
+                        <a:buNone/>
+                      </a:pPr>
+                      <a:r>
+                        <a:rPr lang="en-US" sz="1200"/>
+                        <a:t>bind </a:t>
+                      </a:r>
+                      <a:r>
+                        <a:rPr lang="en-US" sz="1200">
+                          <a:latin typeface="Courier New" panose="02070309020205020404" pitchFamily="49" charset="0"/>
+                        </a:rPr>
+                        <a:t>edit</a:t>
+                      </a:r>
+                      <a:r>
+                        <a:rPr lang="en-US" sz="1200"/>
+                        <a:t> to user</a:t>
+                      </a:r>
+                    </a:p>
+                  </a:txBody>
+                  <a:tcPr marL="37641" marR="37641" marT="18820" marB="18820" anchor="ctr">
+                    <a:lnL w="12700" cap="flat" cmpd="sng" algn="ctr">
+                      <a:solidFill>
+                        <a:schemeClr val="tx1"/>
+                      </a:solidFill>
+                      <a:prstDash val="solid"/>
+                      <a:round/>
+                      <a:headEnd type="none" w="med" len="med"/>
+                      <a:tailEnd type="none" w="med" len="med"/>
+                    </a:lnL>
+                    <a:lnR w="12700" cap="flat" cmpd="sng" algn="ctr">
+                      <a:solidFill>
+                        <a:schemeClr val="tx1"/>
+                      </a:solidFill>
+                      <a:prstDash val="solid"/>
+                      <a:round/>
+                      <a:headEnd type="none" w="med" len="med"/>
+                      <a:tailEnd type="none" w="med" len="med"/>
+                    </a:lnR>
+                    <a:lnT w="12700" cap="flat" cmpd="sng" algn="ctr">
+                      <a:solidFill>
+                        <a:schemeClr val="tx1"/>
+                      </a:solidFill>
+                      <a:prstDash val="solid"/>
+                      <a:round/>
+                      <a:headEnd type="none" w="med" len="med"/>
+                      <a:tailEnd type="none" w="med" len="med"/>
+                    </a:lnT>
+                    <a:lnB w="12700" cap="flat" cmpd="sng" algn="ctr">
+                      <a:solidFill>
+                        <a:schemeClr val="tx1"/>
+                      </a:solidFill>
+                      <a:prstDash val="solid"/>
+                      <a:round/>
+                      <a:headEnd type="none" w="med" len="med"/>
+                      <a:tailEnd type="none" w="med" len="med"/>
+                    </a:lnB>
+                    <a:noFill/>
+                  </a:tcPr>
+                </a:tc>
+                <a:tc>
+                  <a:txBody>
+                    <a:bodyPr/>
+                    <a:lstStyle/>
+                    <a:p>
+                      <a:pPr>
+                        <a:buNone/>
+                      </a:pPr>
+                      <a:r>
+                        <a:rPr lang="en-US" sz="1200"/>
+                        <a:t>When giving access in one project</a:t>
+                      </a:r>
+                    </a:p>
+                  </a:txBody>
+                  <a:tcPr marL="37641" marR="37641" marT="18820" marB="18820" anchor="ctr">
+                    <a:lnL w="12700" cap="flat" cmpd="sng" algn="ctr">
+                      <a:solidFill>
+                        <a:schemeClr val="tx1"/>
+                      </a:solidFill>
+                      <a:prstDash val="solid"/>
+                      <a:round/>
+                      <a:headEnd type="none" w="med" len="med"/>
+                      <a:tailEnd type="none" w="med" len="med"/>
+                    </a:lnL>
+                    <a:lnR w="12700" cap="flat" cmpd="sng" algn="ctr">
+                      <a:solidFill>
+                        <a:schemeClr val="tx1"/>
+                      </a:solidFill>
+                      <a:prstDash val="solid"/>
+                      <a:round/>
+                      <a:headEnd type="none" w="med" len="med"/>
+                      <a:tailEnd type="none" w="med" len="med"/>
+                    </a:lnR>
+                    <a:lnT w="12700" cap="flat" cmpd="sng" algn="ctr">
+                      <a:solidFill>
+                        <a:schemeClr val="tx1"/>
+                      </a:solidFill>
+                      <a:prstDash val="solid"/>
+                      <a:round/>
+                      <a:headEnd type="none" w="med" len="med"/>
+                      <a:tailEnd type="none" w="med" len="med"/>
+                    </a:lnT>
+                    <a:lnB w="12700" cap="flat" cmpd="sng" algn="ctr">
+                      <a:solidFill>
+                        <a:schemeClr val="tx1"/>
+                      </a:solidFill>
+                      <a:prstDash val="solid"/>
+                      <a:round/>
+                      <a:headEnd type="none" w="med" len="med"/>
+                      <a:tailEnd type="none" w="med" len="med"/>
+                    </a:lnB>
+                    <a:noFill/>
+                  </a:tcPr>
+                </a:tc>
+                <a:extLst>
+                  <a:ext uri="{0D108BD9-81ED-4DB2-BD59-A6C34878D82A}">
+                    <a16:rowId xmlns:a16="http://schemas.microsoft.com/office/drawing/2014/main" val="1176374677"/>
+                  </a:ext>
+                </a:extLst>
+              </a:tr>
+              <a:tr h="490171">
+                <a:tc>
+                  <a:txBody>
+                    <a:bodyPr/>
+                    <a:lstStyle/>
+                    <a:p>
+                      <a:pPr>
+                        <a:buNone/>
+                      </a:pPr>
+                      <a:r>
+                        <a:rPr lang="en-US" sz="1200" b="1"/>
+                        <a:t>ClusterRoleBinding</a:t>
+                      </a:r>
+                      <a:endParaRPr lang="en-US" sz="1200"/>
+                    </a:p>
+                  </a:txBody>
+                  <a:tcPr marL="37641" marR="37641" marT="18820" marB="18820" anchor="ctr">
+                    <a:lnL w="12700" cap="flat" cmpd="sng" algn="ctr">
+                      <a:solidFill>
+                        <a:schemeClr val="tx1"/>
+                      </a:solidFill>
+                      <a:prstDash val="solid"/>
+                      <a:round/>
+                      <a:headEnd type="none" w="med" len="med"/>
+                      <a:tailEnd type="none" w="med" len="med"/>
+                    </a:lnL>
+                    <a:lnR w="12700" cap="flat" cmpd="sng" algn="ctr">
+                      <a:solidFill>
+                        <a:schemeClr val="tx1"/>
+                      </a:solidFill>
+                      <a:prstDash val="solid"/>
+                      <a:round/>
+                      <a:headEnd type="none" w="med" len="med"/>
+                      <a:tailEnd type="none" w="med" len="med"/>
+                    </a:lnR>
+                    <a:lnT w="12700" cap="flat" cmpd="sng" algn="ctr">
+                      <a:solidFill>
+                        <a:schemeClr val="tx1"/>
+                      </a:solidFill>
+                      <a:prstDash val="solid"/>
+                      <a:round/>
+                      <a:headEnd type="none" w="med" len="med"/>
+                      <a:tailEnd type="none" w="med" len="med"/>
+                    </a:lnT>
+                    <a:lnB w="12700" cap="flat" cmpd="sng" algn="ctr">
+                      <a:solidFill>
+                        <a:schemeClr val="tx1"/>
+                      </a:solidFill>
+                      <a:prstDash val="solid"/>
+                      <a:round/>
+                      <a:headEnd type="none" w="med" len="med"/>
+                      <a:tailEnd type="none" w="med" len="med"/>
+                    </a:lnB>
+                    <a:noFill/>
+                  </a:tcPr>
+                </a:tc>
+                <a:tc>
+                  <a:txBody>
+                    <a:bodyPr/>
+                    <a:lstStyle/>
+                    <a:p>
+                      <a:pPr>
+                        <a:buNone/>
+                      </a:pPr>
+                      <a:r>
+                        <a:rPr lang="en-US" sz="1200"/>
+                        <a:t>Connects ClusterRole → User/Group/SA</a:t>
+                      </a:r>
+                    </a:p>
+                  </a:txBody>
+                  <a:tcPr marL="37641" marR="37641" marT="18820" marB="18820" anchor="ctr">
+                    <a:lnL w="12700" cap="flat" cmpd="sng" algn="ctr">
+                      <a:solidFill>
+                        <a:schemeClr val="tx1"/>
+                      </a:solidFill>
+                      <a:prstDash val="solid"/>
+                      <a:round/>
+                      <a:headEnd type="none" w="med" len="med"/>
+                      <a:tailEnd type="none" w="med" len="med"/>
+                    </a:lnL>
+                    <a:lnR w="12700" cap="flat" cmpd="sng" algn="ctr">
+                      <a:solidFill>
+                        <a:schemeClr val="tx1"/>
+                      </a:solidFill>
+                      <a:prstDash val="solid"/>
+                      <a:round/>
+                      <a:headEnd type="none" w="med" len="med"/>
+                      <a:tailEnd type="none" w="med" len="med"/>
+                    </a:lnR>
+                    <a:lnT w="12700" cap="flat" cmpd="sng" algn="ctr">
+                      <a:solidFill>
+                        <a:schemeClr val="tx1"/>
+                      </a:solidFill>
+                      <a:prstDash val="solid"/>
+                      <a:round/>
+                      <a:headEnd type="none" w="med" len="med"/>
+                      <a:tailEnd type="none" w="med" len="med"/>
+                    </a:lnT>
+                    <a:lnB w="12700" cap="flat" cmpd="sng" algn="ctr">
+                      <a:solidFill>
+                        <a:schemeClr val="tx1"/>
+                      </a:solidFill>
+                      <a:prstDash val="solid"/>
+                      <a:round/>
+                      <a:headEnd type="none" w="med" len="med"/>
+                      <a:tailEnd type="none" w="med" len="med"/>
+                    </a:lnB>
+                    <a:noFill/>
+                  </a:tcPr>
+                </a:tc>
+                <a:tc>
+                  <a:txBody>
+                    <a:bodyPr/>
+                    <a:lstStyle/>
+                    <a:p>
+                      <a:pPr>
+                        <a:buNone/>
+                      </a:pPr>
+                      <a:r>
+                        <a:rPr lang="en-US" sz="1200"/>
+                        <a:t>Grants cluster-wide access</a:t>
+                      </a:r>
+                    </a:p>
+                  </a:txBody>
+                  <a:tcPr marL="37641" marR="37641" marT="18820" marB="18820" anchor="ctr">
+                    <a:lnL w="12700" cap="flat" cmpd="sng" algn="ctr">
+                      <a:solidFill>
+                        <a:schemeClr val="tx1"/>
+                      </a:solidFill>
+                      <a:prstDash val="solid"/>
+                      <a:round/>
+                      <a:headEnd type="none" w="med" len="med"/>
+                      <a:tailEnd type="none" w="med" len="med"/>
+                    </a:lnL>
+                    <a:lnR w="12700" cap="flat" cmpd="sng" algn="ctr">
+                      <a:solidFill>
+                        <a:schemeClr val="tx1"/>
+                      </a:solidFill>
+                      <a:prstDash val="solid"/>
+                      <a:round/>
+                      <a:headEnd type="none" w="med" len="med"/>
+                      <a:tailEnd type="none" w="med" len="med"/>
+                    </a:lnR>
+                    <a:lnT w="12700" cap="flat" cmpd="sng" algn="ctr">
+                      <a:solidFill>
+                        <a:schemeClr val="tx1"/>
+                      </a:solidFill>
+                      <a:prstDash val="solid"/>
+                      <a:round/>
+                      <a:headEnd type="none" w="med" len="med"/>
+                      <a:tailEnd type="none" w="med" len="med"/>
+                    </a:lnT>
+                    <a:lnB w="12700" cap="flat" cmpd="sng" algn="ctr">
+                      <a:solidFill>
+                        <a:schemeClr val="tx1"/>
+                      </a:solidFill>
+                      <a:prstDash val="solid"/>
+                      <a:round/>
+                      <a:headEnd type="none" w="med" len="med"/>
+                      <a:tailEnd type="none" w="med" len="med"/>
+                    </a:lnB>
+                    <a:noFill/>
+                  </a:tcPr>
+                </a:tc>
+                <a:tc>
+                  <a:txBody>
+                    <a:bodyPr/>
+                    <a:lstStyle/>
+                    <a:p>
+                      <a:pPr>
+                        <a:buNone/>
+                      </a:pPr>
+                      <a:r>
+                        <a:rPr lang="en-US" sz="1200"/>
+                        <a:t>Cluster</a:t>
+                      </a:r>
+                    </a:p>
+                  </a:txBody>
+                  <a:tcPr marL="37641" marR="37641" marT="18820" marB="18820" anchor="ctr">
+                    <a:lnL w="12700" cap="flat" cmpd="sng" algn="ctr">
+                      <a:solidFill>
+                        <a:schemeClr val="tx1"/>
+                      </a:solidFill>
+                      <a:prstDash val="solid"/>
+                      <a:round/>
+                      <a:headEnd type="none" w="med" len="med"/>
+                      <a:tailEnd type="none" w="med" len="med"/>
+                    </a:lnL>
+                    <a:lnR w="12700" cap="flat" cmpd="sng" algn="ctr">
+                      <a:solidFill>
+                        <a:schemeClr val="tx1"/>
+                      </a:solidFill>
+                      <a:prstDash val="solid"/>
+                      <a:round/>
+                      <a:headEnd type="none" w="med" len="med"/>
+                      <a:tailEnd type="none" w="med" len="med"/>
+                    </a:lnR>
+                    <a:lnT w="12700" cap="flat" cmpd="sng" algn="ctr">
+                      <a:solidFill>
+                        <a:schemeClr val="tx1"/>
+                      </a:solidFill>
+                      <a:prstDash val="solid"/>
+                      <a:round/>
+                      <a:headEnd type="none" w="med" len="med"/>
+                      <a:tailEnd type="none" w="med" len="med"/>
+                    </a:lnT>
+                    <a:lnB w="12700" cap="flat" cmpd="sng" algn="ctr">
+                      <a:solidFill>
+                        <a:schemeClr val="tx1"/>
+                      </a:solidFill>
+                      <a:prstDash val="solid"/>
+                      <a:round/>
+                      <a:headEnd type="none" w="med" len="med"/>
+                      <a:tailEnd type="none" w="med" len="med"/>
+                    </a:lnB>
+                    <a:noFill/>
+                  </a:tcPr>
+                </a:tc>
+                <a:tc>
+                  <a:txBody>
+                    <a:bodyPr/>
+                    <a:lstStyle/>
+                    <a:p>
+                      <a:pPr>
+                        <a:buNone/>
+                      </a:pPr>
+                      <a:r>
+                        <a:rPr lang="en-US" sz="1200"/>
+                        <a:t>bind </a:t>
+                      </a:r>
+                      <a:r>
+                        <a:rPr lang="en-US" sz="1200">
+                          <a:latin typeface="Courier New" panose="02070309020205020404" pitchFamily="49" charset="0"/>
+                        </a:rPr>
+                        <a:t>cluster-admin</a:t>
+                      </a:r>
+                      <a:endParaRPr lang="en-US" sz="1200"/>
+                    </a:p>
+                  </a:txBody>
+                  <a:tcPr marL="37641" marR="37641" marT="18820" marB="18820" anchor="ctr">
+                    <a:lnL w="12700" cap="flat" cmpd="sng" algn="ctr">
+                      <a:solidFill>
+                        <a:schemeClr val="tx1"/>
+                      </a:solidFill>
+                      <a:prstDash val="solid"/>
+                      <a:round/>
+                      <a:headEnd type="none" w="med" len="med"/>
+                      <a:tailEnd type="none" w="med" len="med"/>
+                    </a:lnL>
+                    <a:lnR w="12700" cap="flat" cmpd="sng" algn="ctr">
+                      <a:solidFill>
+                        <a:schemeClr val="tx1"/>
+                      </a:solidFill>
+                      <a:prstDash val="solid"/>
+                      <a:round/>
+                      <a:headEnd type="none" w="med" len="med"/>
+                      <a:tailEnd type="none" w="med" len="med"/>
+                    </a:lnR>
+                    <a:lnT w="12700" cap="flat" cmpd="sng" algn="ctr">
+                      <a:solidFill>
+                        <a:schemeClr val="tx1"/>
+                      </a:solidFill>
+                      <a:prstDash val="solid"/>
+                      <a:round/>
+                      <a:headEnd type="none" w="med" len="med"/>
+                      <a:tailEnd type="none" w="med" len="med"/>
+                    </a:lnT>
+                    <a:lnB w="12700" cap="flat" cmpd="sng" algn="ctr">
+                      <a:solidFill>
+                        <a:schemeClr val="tx1"/>
+                      </a:solidFill>
+                      <a:prstDash val="solid"/>
+                      <a:round/>
+                      <a:headEnd type="none" w="med" len="med"/>
+                      <a:tailEnd type="none" w="med" len="med"/>
+                    </a:lnB>
+                    <a:noFill/>
+                  </a:tcPr>
+                </a:tc>
+                <a:tc>
+                  <a:txBody>
+                    <a:bodyPr/>
+                    <a:lstStyle/>
+                    <a:p>
+                      <a:pPr>
+                        <a:buNone/>
+                      </a:pPr>
+                      <a:r>
+                        <a:rPr lang="en-US" sz="1200" dirty="0"/>
+                        <a:t>When giving global access</a:t>
+                      </a:r>
+                    </a:p>
+                  </a:txBody>
+                  <a:tcPr marL="37641" marR="37641" marT="18820" marB="18820" anchor="ctr">
+                    <a:lnL w="12700" cap="flat" cmpd="sng" algn="ctr">
+                      <a:solidFill>
+                        <a:schemeClr val="tx1"/>
+                      </a:solidFill>
+                      <a:prstDash val="solid"/>
+                      <a:round/>
+                      <a:headEnd type="none" w="med" len="med"/>
+                      <a:tailEnd type="none" w="med" len="med"/>
+                    </a:lnL>
+                    <a:lnR w="12700" cap="flat" cmpd="sng" algn="ctr">
+                      <a:solidFill>
+                        <a:schemeClr val="tx1"/>
+                      </a:solidFill>
+                      <a:prstDash val="solid"/>
+                      <a:round/>
+                      <a:headEnd type="none" w="med" len="med"/>
+                      <a:tailEnd type="none" w="med" len="med"/>
+                    </a:lnR>
+                    <a:lnT w="12700" cap="flat" cmpd="sng" algn="ctr">
+                      <a:solidFill>
+                        <a:schemeClr val="tx1"/>
+                      </a:solidFill>
+                      <a:prstDash val="solid"/>
+                      <a:round/>
+                      <a:headEnd type="none" w="med" len="med"/>
+                      <a:tailEnd type="none" w="med" len="med"/>
+                    </a:lnT>
+                    <a:lnB w="12700" cap="flat" cmpd="sng" algn="ctr">
+                      <a:solidFill>
+                        <a:schemeClr val="tx1"/>
+                      </a:solidFill>
+                      <a:prstDash val="solid"/>
+                      <a:round/>
+                      <a:headEnd type="none" w="med" len="med"/>
+                      <a:tailEnd type="none" w="med" len="med"/>
+                    </a:lnB>
+                    <a:noFill/>
+                  </a:tcPr>
+                </a:tc>
+                <a:extLst>
+                  <a:ext uri="{0D108BD9-81ED-4DB2-BD59-A6C34878D82A}">
+                    <a16:rowId xmlns:a16="http://schemas.microsoft.com/office/drawing/2014/main" val="3591794020"/>
+                  </a:ext>
+                </a:extLst>
+              </a:tr>
+            </a:tbl>
+          </a:graphicData>
+        </a:graphic>
+      </p:graphicFrame>
+    </p:spTree>
+    <p:extLst>
+      <p:ext uri="{BB962C8B-B14F-4D97-AF65-F5344CB8AC3E}">
+        <p14:creationId xmlns:p14="http://schemas.microsoft.com/office/powerpoint/2010/main" val="1572107972"/>
+      </p:ext>
+    </p:extLst>
+  </p:cSld>
+  <p:clrMapOvr>
+    <a:masterClrMapping/>
+  </p:clrMapOvr>
+</p:sld>
+</file>
+
+<file path=ppt/slides/slide12.xml><?xml version="1.0" encoding="utf-8"?>
+<p:sld xmlns:a="http://schemas.openxmlformats.org/drawingml/2006/main" xmlns:r="http://schemas.openxmlformats.org/officeDocument/2006/relationships" xmlns:p="http://schemas.openxmlformats.org/presentationml/2006/main">
+  <p:cSld>
     <p:bg>
       <p:bgPr>
         <a:gradFill rotWithShape="1">
@@ -35103,7 +38751,7 @@
 </p:sld>
 </file>
 
-<file path=ppt/slides/slide12.xml><?xml version="1.0" encoding="utf-8"?>
+<file path=ppt/slides/slide13.xml><?xml version="1.0" encoding="utf-8"?>
 <p:sld xmlns:a="http://schemas.openxmlformats.org/drawingml/2006/main" xmlns:r="http://schemas.openxmlformats.org/officeDocument/2006/relationships" xmlns:p="http://schemas.openxmlformats.org/presentationml/2006/main">
   <p:cSld>
     <p:bg>
@@ -35911,7 +39559,7 @@
 </p:sld>
 </file>
 
-<file path=ppt/slides/slide13.xml><?xml version="1.0" encoding="utf-8"?>
+<file path=ppt/slides/slide14.xml><?xml version="1.0" encoding="utf-8"?>
 <p:sld xmlns:a="http://schemas.openxmlformats.org/drawingml/2006/main" xmlns:r="http://schemas.openxmlformats.org/officeDocument/2006/relationships" xmlns:p="http://schemas.openxmlformats.org/presentationml/2006/main">
   <p:cSld>
     <p:bg>
@@ -36719,7 +40367,7 @@
 </p:sld>
 </file>
 
-<file path=ppt/slides/slide14.xml><?xml version="1.0" encoding="utf-8"?>
+<file path=ppt/slides/slide15.xml><?xml version="1.0" encoding="utf-8"?>
 <p:sld xmlns:a="http://schemas.openxmlformats.org/drawingml/2006/main" xmlns:r="http://schemas.openxmlformats.org/officeDocument/2006/relationships" xmlns:p="http://schemas.openxmlformats.org/presentationml/2006/main">
   <p:cSld>
     <p:bg>
@@ -39031,7 +42679,7 @@
 </p:sld>
 </file>
 
-<file path=ppt/slides/slide15.xml><?xml version="1.0" encoding="utf-8"?>
+<file path=ppt/slides/slide16.xml><?xml version="1.0" encoding="utf-8"?>
 <p:sld xmlns:a="http://schemas.openxmlformats.org/drawingml/2006/main" xmlns:r="http://schemas.openxmlformats.org/officeDocument/2006/relationships" xmlns:p="http://schemas.openxmlformats.org/presentationml/2006/main">
   <p:cSld>
     <p:bg>
@@ -39839,7 +43487,7 @@
 </p:sld>
 </file>
 
-<file path=ppt/slides/slide16.xml><?xml version="1.0" encoding="utf-8"?>
+<file path=ppt/slides/slide17.xml><?xml version="1.0" encoding="utf-8"?>
 <p:sld xmlns:a="http://schemas.openxmlformats.org/drawingml/2006/main" xmlns:r="http://schemas.openxmlformats.org/officeDocument/2006/relationships" xmlns:p="http://schemas.openxmlformats.org/presentationml/2006/main">
   <p:cSld>
     <p:bg>
@@ -41225,7 +44873,7 @@
           <a:lstStyle/>
           <a:p>
             <a:r>
-              <a:rPr lang="en-US"/>
+              <a:rPr lang="en-US" dirty="0"/>
               <a:t>User → Login → OAuth → RBAC → Access Resource</a:t>
             </a:r>
           </a:p>
@@ -41247,7 +44895,7 @@
 </p:sld>
 </file>
 
-<file path=ppt/slides/slide17.xml><?xml version="1.0" encoding="utf-8"?>
+<file path=ppt/slides/slide18.xml><?xml version="1.0" encoding="utf-8"?>
 <p:sld xmlns:a="http://schemas.openxmlformats.org/drawingml/2006/main" xmlns:r="http://schemas.openxmlformats.org/officeDocument/2006/relationships" xmlns:p="http://schemas.openxmlformats.org/presentationml/2006/main">
   <p:cSld>
     <p:bg>
@@ -48512,4 +52160,319 @@
     </a:ext>
   </a:extLst>
 </a:theme>
+</file>
+
+<file path=ppt/theme/theme2.xml><?xml version="1.0" encoding="utf-8"?>
+<a:theme xmlns:a="http://schemas.openxmlformats.org/drawingml/2006/main" name="Office Theme">
+  <a:themeElements>
+    <a:clrScheme name="Office">
+      <a:dk1>
+        <a:sysClr val="windowText" lastClr="000000"/>
+      </a:dk1>
+      <a:lt1>
+        <a:sysClr val="window" lastClr="FFFFFF"/>
+      </a:lt1>
+      <a:dk2>
+        <a:srgbClr val="0E2841"/>
+      </a:dk2>
+      <a:lt2>
+        <a:srgbClr val="E8E8E8"/>
+      </a:lt2>
+      <a:accent1>
+        <a:srgbClr val="156082"/>
+      </a:accent1>
+      <a:accent2>
+        <a:srgbClr val="E97132"/>
+      </a:accent2>
+      <a:accent3>
+        <a:srgbClr val="196B24"/>
+      </a:accent3>
+      <a:accent4>
+        <a:srgbClr val="0F9ED5"/>
+      </a:accent4>
+      <a:accent5>
+        <a:srgbClr val="A02B93"/>
+      </a:accent5>
+      <a:accent6>
+        <a:srgbClr val="4EA72E"/>
+      </a:accent6>
+      <a:hlink>
+        <a:srgbClr val="467886"/>
+      </a:hlink>
+      <a:folHlink>
+        <a:srgbClr val="96607D"/>
+      </a:folHlink>
+    </a:clrScheme>
+    <a:fontScheme name="Office">
+      <a:majorFont>
+        <a:latin typeface="Aptos Display" panose="02110004020202020204"/>
+        <a:ea typeface=""/>
+        <a:cs typeface=""/>
+        <a:font script="Jpan" typeface="游ゴシック Light"/>
+        <a:font script="Hang" typeface="맑은 고딕"/>
+        <a:font script="Hans" typeface="等线 Light"/>
+        <a:font script="Hant" typeface="新細明體"/>
+        <a:font script="Arab" typeface="Times New Roman"/>
+        <a:font script="Hebr" typeface="Times New Roman"/>
+        <a:font script="Thai" typeface="Angsana New"/>
+        <a:font script="Ethi" typeface="Nyala"/>
+        <a:font script="Beng" typeface="Vrinda"/>
+        <a:font script="Gujr" typeface="Shruti"/>
+        <a:font script="Khmr" typeface="MoolBoran"/>
+        <a:font script="Knda" typeface="Tunga"/>
+        <a:font script="Guru" typeface="Raavi"/>
+        <a:font script="Cans" typeface="Euphemia"/>
+        <a:font script="Cher" typeface="Plantagenet Cherokee"/>
+        <a:font script="Yiii" typeface="Microsoft Yi Baiti"/>
+        <a:font script="Tibt" typeface="Microsoft Himalaya"/>
+        <a:font script="Thaa" typeface="MV Boli"/>
+        <a:font script="Deva" typeface="Mangal"/>
+        <a:font script="Telu" typeface="Gautami"/>
+        <a:font script="Taml" typeface="Latha"/>
+        <a:font script="Syrc" typeface="Estrangelo Edessa"/>
+        <a:font script="Orya" typeface="Kalinga"/>
+        <a:font script="Mlym" typeface="Kartika"/>
+        <a:font script="Laoo" typeface="DokChampa"/>
+        <a:font script="Sinh" typeface="Iskoola Pota"/>
+        <a:font script="Mong" typeface="Mongolian Baiti"/>
+        <a:font script="Viet" typeface="Times New Roman"/>
+        <a:font script="Uigh" typeface="Microsoft Uighur"/>
+        <a:font script="Geor" typeface="Sylfaen"/>
+        <a:font script="Armn" typeface="Arial"/>
+        <a:font script="Bugi" typeface="Leelawadee UI"/>
+        <a:font script="Bopo" typeface="Microsoft JhengHei"/>
+        <a:font script="Java" typeface="Javanese Text"/>
+        <a:font script="Lisu" typeface="Segoe UI"/>
+        <a:font script="Mymr" typeface="Myanmar Text"/>
+        <a:font script="Nkoo" typeface="Ebrima"/>
+        <a:font script="Olck" typeface="Nirmala UI"/>
+        <a:font script="Osma" typeface="Ebrima"/>
+        <a:font script="Phag" typeface="Phagspa"/>
+        <a:font script="Syrn" typeface="Estrangelo Edessa"/>
+        <a:font script="Syrj" typeface="Estrangelo Edessa"/>
+        <a:font script="Syre" typeface="Estrangelo Edessa"/>
+        <a:font script="Sora" typeface="Nirmala UI"/>
+        <a:font script="Tale" typeface="Microsoft Tai Le"/>
+        <a:font script="Talu" typeface="Microsoft New Tai Lue"/>
+        <a:font script="Tfng" typeface="Ebrima"/>
+      </a:majorFont>
+      <a:minorFont>
+        <a:latin typeface="Aptos" panose="02110004020202020204"/>
+        <a:ea typeface=""/>
+        <a:cs typeface=""/>
+        <a:font script="Jpan" typeface="游ゴシック"/>
+        <a:font script="Hang" typeface="맑은 고딕"/>
+        <a:font script="Hans" typeface="等线"/>
+        <a:font script="Hant" typeface="新細明體"/>
+        <a:font script="Arab" typeface="Arial"/>
+        <a:font script="Hebr" typeface="Arial"/>
+        <a:font script="Thai" typeface="Cordia New"/>
+        <a:font script="Ethi" typeface="Nyala"/>
+        <a:font script="Beng" typeface="Vrinda"/>
+        <a:font script="Gujr" typeface="Shruti"/>
+        <a:font script="Khmr" typeface="DaunPenh"/>
+        <a:font script="Knda" typeface="Tunga"/>
+        <a:font script="Guru" typeface="Raavi"/>
+        <a:font script="Cans" typeface="Euphemia"/>
+        <a:font script="Cher" typeface="Plantagenet Cherokee"/>
+        <a:font script="Yiii" typeface="Microsoft Yi Baiti"/>
+        <a:font script="Tibt" typeface="Microsoft Himalaya"/>
+        <a:font script="Thaa" typeface="MV Boli"/>
+        <a:font script="Deva" typeface="Mangal"/>
+        <a:font script="Telu" typeface="Gautami"/>
+        <a:font script="Taml" typeface="Latha"/>
+        <a:font script="Syrc" typeface="Estrangelo Edessa"/>
+        <a:font script="Orya" typeface="Kalinga"/>
+        <a:font script="Mlym" typeface="Kartika"/>
+        <a:font script="Laoo" typeface="DokChampa"/>
+        <a:font script="Sinh" typeface="Iskoola Pota"/>
+        <a:font script="Mong" typeface="Mongolian Baiti"/>
+        <a:font script="Viet" typeface="Arial"/>
+        <a:font script="Uigh" typeface="Microsoft Uighur"/>
+        <a:font script="Geor" typeface="Sylfaen"/>
+        <a:font script="Armn" typeface="Arial"/>
+        <a:font script="Bugi" typeface="Leelawadee UI"/>
+        <a:font script="Bopo" typeface="Microsoft JhengHei"/>
+        <a:font script="Java" typeface="Javanese Text"/>
+        <a:font script="Lisu" typeface="Segoe UI"/>
+        <a:font script="Mymr" typeface="Myanmar Text"/>
+        <a:font script="Nkoo" typeface="Ebrima"/>
+        <a:font script="Olck" typeface="Nirmala UI"/>
+        <a:font script="Osma" typeface="Ebrima"/>
+        <a:font script="Phag" typeface="Phagspa"/>
+        <a:font script="Syrn" typeface="Estrangelo Edessa"/>
+        <a:font script="Syrj" typeface="Estrangelo Edessa"/>
+        <a:font script="Syre" typeface="Estrangelo Edessa"/>
+        <a:font script="Sora" typeface="Nirmala UI"/>
+        <a:font script="Tale" typeface="Microsoft Tai Le"/>
+        <a:font script="Talu" typeface="Microsoft New Tai Lue"/>
+        <a:font script="Tfng" typeface="Ebrima"/>
+      </a:minorFont>
+    </a:fontScheme>
+    <a:fmtScheme name="Office">
+      <a:fillStyleLst>
+        <a:solidFill>
+          <a:schemeClr val="phClr"/>
+        </a:solidFill>
+        <a:gradFill rotWithShape="1">
+          <a:gsLst>
+            <a:gs pos="0">
+              <a:schemeClr val="phClr">
+                <a:lumMod val="110000"/>
+                <a:satMod val="105000"/>
+                <a:tint val="67000"/>
+              </a:schemeClr>
+            </a:gs>
+            <a:gs pos="50000">
+              <a:schemeClr val="phClr">
+                <a:lumMod val="105000"/>
+                <a:satMod val="103000"/>
+                <a:tint val="73000"/>
+              </a:schemeClr>
+            </a:gs>
+            <a:gs pos="100000">
+              <a:schemeClr val="phClr">
+                <a:lumMod val="105000"/>
+                <a:satMod val="109000"/>
+                <a:tint val="81000"/>
+              </a:schemeClr>
+            </a:gs>
+          </a:gsLst>
+          <a:lin ang="5400000" scaled="0"/>
+        </a:gradFill>
+        <a:gradFill rotWithShape="1">
+          <a:gsLst>
+            <a:gs pos="0">
+              <a:schemeClr val="phClr">
+                <a:satMod val="103000"/>
+                <a:lumMod val="102000"/>
+                <a:tint val="94000"/>
+              </a:schemeClr>
+            </a:gs>
+            <a:gs pos="50000">
+              <a:schemeClr val="phClr">
+                <a:satMod val="110000"/>
+                <a:lumMod val="100000"/>
+                <a:shade val="100000"/>
+              </a:schemeClr>
+            </a:gs>
+            <a:gs pos="100000">
+              <a:schemeClr val="phClr">
+                <a:lumMod val="99000"/>
+                <a:satMod val="120000"/>
+                <a:shade val="78000"/>
+              </a:schemeClr>
+            </a:gs>
+          </a:gsLst>
+          <a:lin ang="5400000" scaled="0"/>
+        </a:gradFill>
+      </a:fillStyleLst>
+      <a:lnStyleLst>
+        <a:ln w="12700" cap="flat" cmpd="sng" algn="ctr">
+          <a:solidFill>
+            <a:schemeClr val="phClr"/>
+          </a:solidFill>
+          <a:prstDash val="solid"/>
+          <a:miter lim="800000"/>
+        </a:ln>
+        <a:ln w="19050" cap="flat" cmpd="sng" algn="ctr">
+          <a:solidFill>
+            <a:schemeClr val="phClr"/>
+          </a:solidFill>
+          <a:prstDash val="solid"/>
+          <a:miter lim="800000"/>
+        </a:ln>
+        <a:ln w="25400" cap="flat" cmpd="sng" algn="ctr">
+          <a:solidFill>
+            <a:schemeClr val="phClr"/>
+          </a:solidFill>
+          <a:prstDash val="solid"/>
+          <a:miter lim="800000"/>
+        </a:ln>
+      </a:lnStyleLst>
+      <a:effectStyleLst>
+        <a:effectStyle>
+          <a:effectLst/>
+        </a:effectStyle>
+        <a:effectStyle>
+          <a:effectLst/>
+        </a:effectStyle>
+        <a:effectStyle>
+          <a:effectLst>
+            <a:outerShdw blurRad="57150" dist="19050" dir="5400000" algn="ctr" rotWithShape="0">
+              <a:srgbClr val="000000">
+                <a:alpha val="63000"/>
+              </a:srgbClr>
+            </a:outerShdw>
+          </a:effectLst>
+        </a:effectStyle>
+      </a:effectStyleLst>
+      <a:bgFillStyleLst>
+        <a:solidFill>
+          <a:schemeClr val="phClr"/>
+        </a:solidFill>
+        <a:solidFill>
+          <a:schemeClr val="phClr">
+            <a:tint val="95000"/>
+            <a:satMod val="170000"/>
+          </a:schemeClr>
+        </a:solidFill>
+        <a:gradFill rotWithShape="1">
+          <a:gsLst>
+            <a:gs pos="0">
+              <a:schemeClr val="phClr">
+                <a:tint val="93000"/>
+                <a:satMod val="150000"/>
+                <a:shade val="98000"/>
+                <a:lumMod val="102000"/>
+              </a:schemeClr>
+            </a:gs>
+            <a:gs pos="50000">
+              <a:schemeClr val="phClr">
+                <a:tint val="98000"/>
+                <a:satMod val="130000"/>
+                <a:shade val="90000"/>
+                <a:lumMod val="103000"/>
+              </a:schemeClr>
+            </a:gs>
+            <a:gs pos="100000">
+              <a:schemeClr val="phClr">
+                <a:shade val="63000"/>
+                <a:satMod val="120000"/>
+              </a:schemeClr>
+            </a:gs>
+          </a:gsLst>
+          <a:lin ang="5400000" scaled="0"/>
+        </a:gradFill>
+      </a:bgFillStyleLst>
+    </a:fmtScheme>
+  </a:themeElements>
+  <a:objectDefaults>
+    <a:lnDef>
+      <a:spPr/>
+      <a:bodyPr/>
+      <a:lstStyle/>
+      <a:style>
+        <a:lnRef idx="2">
+          <a:schemeClr val="accent1"/>
+        </a:lnRef>
+        <a:fillRef idx="0">
+          <a:schemeClr val="accent1"/>
+        </a:fillRef>
+        <a:effectRef idx="1">
+          <a:schemeClr val="accent1"/>
+        </a:effectRef>
+        <a:fontRef idx="minor">
+          <a:schemeClr val="tx1"/>
+        </a:fontRef>
+      </a:style>
+    </a:lnDef>
+  </a:objectDefaults>
+  <a:extraClrSchemeLst/>
+  <a:extLst>
+    <a:ext uri="{05A4C25C-085E-4340-85A3-A5531E510DB2}">
+      <thm15:themeFamily xmlns:thm15="http://schemas.microsoft.com/office/thememl/2012/main" name="Office Theme" id="{2E142A2C-CD16-42D6-873A-C26D2A0506FA}" vid="{1BDDFF52-6CD6-40A5-AB3C-68EB2F1E4D0A}"/>
+    </a:ext>
+  </a:extLst>
+</a:theme>
 </file>